--- a/Nuclear_Fuel_Performance/NE533_Spring2026/Module4/Lec21_MOX.pptx
+++ b/Nuclear_Fuel_Performance/NE533_Spring2026/Module4/Lec21_MOX.pptx
@@ -4,26 +4,30 @@
   <p:sldMasterIdLst>
     <p:sldMasterId id="2147483672" r:id="rId1"/>
   </p:sldMasterIdLst>
+  <p:notesMasterIdLst>
+    <p:notesMasterId r:id="rId22"/>
+  </p:notesMasterIdLst>
   <p:sldIdLst>
     <p:sldId id="537" r:id="rId2"/>
     <p:sldId id="342" r:id="rId3"/>
-    <p:sldId id="560" r:id="rId4"/>
-    <p:sldId id="561" r:id="rId5"/>
-    <p:sldId id="548" r:id="rId6"/>
-    <p:sldId id="553" r:id="rId7"/>
-    <p:sldId id="554" r:id="rId8"/>
-    <p:sldId id="555" r:id="rId9"/>
-    <p:sldId id="562" r:id="rId10"/>
-    <p:sldId id="558" r:id="rId11"/>
-    <p:sldId id="563" r:id="rId12"/>
-    <p:sldId id="557" r:id="rId13"/>
-    <p:sldId id="545" r:id="rId14"/>
-    <p:sldId id="543" r:id="rId15"/>
-    <p:sldId id="544" r:id="rId16"/>
-    <p:sldId id="546" r:id="rId17"/>
-    <p:sldId id="565" r:id="rId18"/>
-    <p:sldId id="566" r:id="rId19"/>
-    <p:sldId id="556" r:id="rId20"/>
+    <p:sldId id="552" r:id="rId4"/>
+    <p:sldId id="560" r:id="rId5"/>
+    <p:sldId id="561" r:id="rId6"/>
+    <p:sldId id="548" r:id="rId7"/>
+    <p:sldId id="553" r:id="rId8"/>
+    <p:sldId id="554" r:id="rId9"/>
+    <p:sldId id="555" r:id="rId10"/>
+    <p:sldId id="562" r:id="rId11"/>
+    <p:sldId id="558" r:id="rId12"/>
+    <p:sldId id="563" r:id="rId13"/>
+    <p:sldId id="557" r:id="rId14"/>
+    <p:sldId id="566" r:id="rId15"/>
+    <p:sldId id="556" r:id="rId16"/>
+    <p:sldId id="545" r:id="rId17"/>
+    <p:sldId id="543" r:id="rId18"/>
+    <p:sldId id="544" r:id="rId19"/>
+    <p:sldId id="546" r:id="rId20"/>
+    <p:sldId id="565" r:id="rId21"/>
   </p:sldIdLst>
   <p:sldSz cx="12192000" cy="6858000"/>
   <p:notesSz cx="6858000" cy="9144000"/>
@@ -130,6 +134,439 @@
 </p:presentation>
 </file>
 
+<file path=ppt/notesMasters/notesMaster1.xml><?xml version="1.0" encoding="utf-8"?>
+<p:notesMaster xmlns:a="http://schemas.openxmlformats.org/drawingml/2006/main" xmlns:r="http://schemas.openxmlformats.org/officeDocument/2006/relationships" xmlns:p="http://schemas.openxmlformats.org/presentationml/2006/main">
+  <p:cSld>
+    <p:bg>
+      <p:bgRef idx="1001">
+        <a:schemeClr val="bg1"/>
+      </p:bgRef>
+    </p:bg>
+    <p:spTree>
+      <p:nvGrpSpPr>
+        <p:cNvPr id="1" name=""/>
+        <p:cNvGrpSpPr/>
+        <p:nvPr/>
+      </p:nvGrpSpPr>
+      <p:grpSpPr>
+        <a:xfrm>
+          <a:off x="0" y="0"/>
+          <a:ext cx="0" cy="0"/>
+          <a:chOff x="0" y="0"/>
+          <a:chExt cx="0" cy="0"/>
+        </a:xfrm>
+      </p:grpSpPr>
+      <p:sp>
+        <p:nvSpPr>
+          <p:cNvPr id="2" name="Header Placeholder 1"/>
+          <p:cNvSpPr>
+            <a:spLocks noGrp="1"/>
+          </p:cNvSpPr>
+          <p:nvPr>
+            <p:ph type="hdr" sz="quarter"/>
+          </p:nvPr>
+        </p:nvSpPr>
+        <p:spPr>
+          <a:xfrm>
+            <a:off x="0" y="0"/>
+            <a:ext cx="2971800" cy="458788"/>
+          </a:xfrm>
+          <a:prstGeom prst="rect">
+            <a:avLst/>
+          </a:prstGeom>
+        </p:spPr>
+        <p:txBody>
+          <a:bodyPr vert="horz" lIns="91440" tIns="45720" rIns="91440" bIns="45720" rtlCol="0"/>
+          <a:lstStyle>
+            <a:lvl1pPr algn="l">
+              <a:defRPr sz="1200"/>
+            </a:lvl1pPr>
+          </a:lstStyle>
+          <a:p>
+            <a:endParaRPr lang="en-US"/>
+          </a:p>
+        </p:txBody>
+      </p:sp>
+      <p:sp>
+        <p:nvSpPr>
+          <p:cNvPr id="3" name="Date Placeholder 2"/>
+          <p:cNvSpPr>
+            <a:spLocks noGrp="1"/>
+          </p:cNvSpPr>
+          <p:nvPr>
+            <p:ph type="dt" idx="1"/>
+          </p:nvPr>
+        </p:nvSpPr>
+        <p:spPr>
+          <a:xfrm>
+            <a:off x="3884613" y="0"/>
+            <a:ext cx="2971800" cy="458788"/>
+          </a:xfrm>
+          <a:prstGeom prst="rect">
+            <a:avLst/>
+          </a:prstGeom>
+        </p:spPr>
+        <p:txBody>
+          <a:bodyPr vert="horz" lIns="91440" tIns="45720" rIns="91440" bIns="45720" rtlCol="0"/>
+          <a:lstStyle>
+            <a:lvl1pPr algn="r">
+              <a:defRPr sz="1200"/>
+            </a:lvl1pPr>
+          </a:lstStyle>
+          <a:p>
+            <a:fld id="{F6742E5D-4C33-E349-AC76-364A569987E9}" type="datetimeFigureOut">
+              <a:rPr lang="en-US" smtClean="0"/>
+              <a:t>4/21/26</a:t>
+            </a:fld>
+            <a:endParaRPr lang="en-US"/>
+          </a:p>
+        </p:txBody>
+      </p:sp>
+      <p:sp>
+        <p:nvSpPr>
+          <p:cNvPr id="4" name="Slide Image Placeholder 3"/>
+          <p:cNvSpPr>
+            <a:spLocks noGrp="1" noRot="1" noChangeAspect="1"/>
+          </p:cNvSpPr>
+          <p:nvPr>
+            <p:ph type="sldImg" idx="2"/>
+          </p:nvPr>
+        </p:nvSpPr>
+        <p:spPr>
+          <a:xfrm>
+            <a:off x="685800" y="1143000"/>
+            <a:ext cx="5486400" cy="3086100"/>
+          </a:xfrm>
+          <a:prstGeom prst="rect">
+            <a:avLst/>
+          </a:prstGeom>
+          <a:noFill/>
+          <a:ln w="12700">
+            <a:solidFill>
+              <a:prstClr val="black"/>
+            </a:solidFill>
+          </a:ln>
+        </p:spPr>
+        <p:txBody>
+          <a:bodyPr vert="horz" lIns="91440" tIns="45720" rIns="91440" bIns="45720" rtlCol="0" anchor="ctr"/>
+          <a:lstStyle/>
+          <a:p>
+            <a:endParaRPr lang="en-US"/>
+          </a:p>
+        </p:txBody>
+      </p:sp>
+      <p:sp>
+        <p:nvSpPr>
+          <p:cNvPr id="5" name="Notes Placeholder 4"/>
+          <p:cNvSpPr>
+            <a:spLocks noGrp="1"/>
+          </p:cNvSpPr>
+          <p:nvPr>
+            <p:ph type="body" sz="quarter" idx="3"/>
+          </p:nvPr>
+        </p:nvSpPr>
+        <p:spPr>
+          <a:xfrm>
+            <a:off x="685800" y="4400550"/>
+            <a:ext cx="5486400" cy="3600450"/>
+          </a:xfrm>
+          <a:prstGeom prst="rect">
+            <a:avLst/>
+          </a:prstGeom>
+        </p:spPr>
+        <p:txBody>
+          <a:bodyPr vert="horz" lIns="91440" tIns="45720" rIns="91440" bIns="45720" rtlCol="0"/>
+          <a:lstStyle/>
+          <a:p>
+            <a:pPr lvl="0"/>
+            <a:r>
+              <a:rPr lang="en-US"/>
+              <a:t>Click to edit Master text styles</a:t>
+            </a:r>
+          </a:p>
+          <a:p>
+            <a:pPr lvl="1"/>
+            <a:r>
+              <a:rPr lang="en-US"/>
+              <a:t>Second level</a:t>
+            </a:r>
+          </a:p>
+          <a:p>
+            <a:pPr lvl="2"/>
+            <a:r>
+              <a:rPr lang="en-US"/>
+              <a:t>Third level</a:t>
+            </a:r>
+          </a:p>
+          <a:p>
+            <a:pPr lvl="3"/>
+            <a:r>
+              <a:rPr lang="en-US"/>
+              <a:t>Fourth level</a:t>
+            </a:r>
+          </a:p>
+          <a:p>
+            <a:pPr lvl="4"/>
+            <a:r>
+              <a:rPr lang="en-US"/>
+              <a:t>Fifth level</a:t>
+            </a:r>
+          </a:p>
+        </p:txBody>
+      </p:sp>
+      <p:sp>
+        <p:nvSpPr>
+          <p:cNvPr id="6" name="Footer Placeholder 5"/>
+          <p:cNvSpPr>
+            <a:spLocks noGrp="1"/>
+          </p:cNvSpPr>
+          <p:nvPr>
+            <p:ph type="ftr" sz="quarter" idx="4"/>
+          </p:nvPr>
+        </p:nvSpPr>
+        <p:spPr>
+          <a:xfrm>
+            <a:off x="0" y="8685213"/>
+            <a:ext cx="2971800" cy="458787"/>
+          </a:xfrm>
+          <a:prstGeom prst="rect">
+            <a:avLst/>
+          </a:prstGeom>
+        </p:spPr>
+        <p:txBody>
+          <a:bodyPr vert="horz" lIns="91440" tIns="45720" rIns="91440" bIns="45720" rtlCol="0" anchor="b"/>
+          <a:lstStyle>
+            <a:lvl1pPr algn="l">
+              <a:defRPr sz="1200"/>
+            </a:lvl1pPr>
+          </a:lstStyle>
+          <a:p>
+            <a:endParaRPr lang="en-US"/>
+          </a:p>
+        </p:txBody>
+      </p:sp>
+      <p:sp>
+        <p:nvSpPr>
+          <p:cNvPr id="7" name="Slide Number Placeholder 6"/>
+          <p:cNvSpPr>
+            <a:spLocks noGrp="1"/>
+          </p:cNvSpPr>
+          <p:nvPr>
+            <p:ph type="sldNum" sz="quarter" idx="5"/>
+          </p:nvPr>
+        </p:nvSpPr>
+        <p:spPr>
+          <a:xfrm>
+            <a:off x="3884613" y="8685213"/>
+            <a:ext cx="2971800" cy="458787"/>
+          </a:xfrm>
+          <a:prstGeom prst="rect">
+            <a:avLst/>
+          </a:prstGeom>
+        </p:spPr>
+        <p:txBody>
+          <a:bodyPr vert="horz" lIns="91440" tIns="45720" rIns="91440" bIns="45720" rtlCol="0" anchor="b"/>
+          <a:lstStyle>
+            <a:lvl1pPr algn="r">
+              <a:defRPr sz="1200"/>
+            </a:lvl1pPr>
+          </a:lstStyle>
+          <a:p>
+            <a:fld id="{9F0CB708-9F47-034E-9DD6-7E4FB23B5C1B}" type="slidenum">
+              <a:rPr lang="en-US" smtClean="0"/>
+              <a:t>‹#›</a:t>
+            </a:fld>
+            <a:endParaRPr lang="en-US"/>
+          </a:p>
+        </p:txBody>
+      </p:sp>
+    </p:spTree>
+    <p:extLst>
+      <p:ext uri="{BB962C8B-B14F-4D97-AF65-F5344CB8AC3E}">
+        <p14:creationId xmlns:p14="http://schemas.microsoft.com/office/powerpoint/2010/main" val="2249489960"/>
+      </p:ext>
+    </p:extLst>
+  </p:cSld>
+  <p:clrMap bg1="lt1" tx1="dk1" bg2="lt2" tx2="dk2" accent1="accent1" accent2="accent2" accent3="accent3" accent4="accent4" accent5="accent5" accent6="accent6" hlink="hlink" folHlink="folHlink"/>
+  <p:notesStyle>
+    <a:lvl1pPr marL="0" algn="l" defTabSz="914400" rtl="0" eaLnBrk="1" latinLnBrk="0" hangingPunct="1">
+      <a:defRPr sz="1200" kern="1200">
+        <a:solidFill>
+          <a:schemeClr val="tx1"/>
+        </a:solidFill>
+        <a:latin typeface="+mn-lt"/>
+        <a:ea typeface="+mn-ea"/>
+        <a:cs typeface="+mn-cs"/>
+      </a:defRPr>
+    </a:lvl1pPr>
+    <a:lvl2pPr marL="457200" algn="l" defTabSz="914400" rtl="0" eaLnBrk="1" latinLnBrk="0" hangingPunct="1">
+      <a:defRPr sz="1200" kern="1200">
+        <a:solidFill>
+          <a:schemeClr val="tx1"/>
+        </a:solidFill>
+        <a:latin typeface="+mn-lt"/>
+        <a:ea typeface="+mn-ea"/>
+        <a:cs typeface="+mn-cs"/>
+      </a:defRPr>
+    </a:lvl2pPr>
+    <a:lvl3pPr marL="914400" algn="l" defTabSz="914400" rtl="0" eaLnBrk="1" latinLnBrk="0" hangingPunct="1">
+      <a:defRPr sz="1200" kern="1200">
+        <a:solidFill>
+          <a:schemeClr val="tx1"/>
+        </a:solidFill>
+        <a:latin typeface="+mn-lt"/>
+        <a:ea typeface="+mn-ea"/>
+        <a:cs typeface="+mn-cs"/>
+      </a:defRPr>
+    </a:lvl3pPr>
+    <a:lvl4pPr marL="1371600" algn="l" defTabSz="914400" rtl="0" eaLnBrk="1" latinLnBrk="0" hangingPunct="1">
+      <a:defRPr sz="1200" kern="1200">
+        <a:solidFill>
+          <a:schemeClr val="tx1"/>
+        </a:solidFill>
+        <a:latin typeface="+mn-lt"/>
+        <a:ea typeface="+mn-ea"/>
+        <a:cs typeface="+mn-cs"/>
+      </a:defRPr>
+    </a:lvl4pPr>
+    <a:lvl5pPr marL="1828800" algn="l" defTabSz="914400" rtl="0" eaLnBrk="1" latinLnBrk="0" hangingPunct="1">
+      <a:defRPr sz="1200" kern="1200">
+        <a:solidFill>
+          <a:schemeClr val="tx1"/>
+        </a:solidFill>
+        <a:latin typeface="+mn-lt"/>
+        <a:ea typeface="+mn-ea"/>
+        <a:cs typeface="+mn-cs"/>
+      </a:defRPr>
+    </a:lvl5pPr>
+    <a:lvl6pPr marL="2286000" algn="l" defTabSz="914400" rtl="0" eaLnBrk="1" latinLnBrk="0" hangingPunct="1">
+      <a:defRPr sz="1200" kern="1200">
+        <a:solidFill>
+          <a:schemeClr val="tx1"/>
+        </a:solidFill>
+        <a:latin typeface="+mn-lt"/>
+        <a:ea typeface="+mn-ea"/>
+        <a:cs typeface="+mn-cs"/>
+      </a:defRPr>
+    </a:lvl6pPr>
+    <a:lvl7pPr marL="2743200" algn="l" defTabSz="914400" rtl="0" eaLnBrk="1" latinLnBrk="0" hangingPunct="1">
+      <a:defRPr sz="1200" kern="1200">
+        <a:solidFill>
+          <a:schemeClr val="tx1"/>
+        </a:solidFill>
+        <a:latin typeface="+mn-lt"/>
+        <a:ea typeface="+mn-ea"/>
+        <a:cs typeface="+mn-cs"/>
+      </a:defRPr>
+    </a:lvl7pPr>
+    <a:lvl8pPr marL="3200400" algn="l" defTabSz="914400" rtl="0" eaLnBrk="1" latinLnBrk="0" hangingPunct="1">
+      <a:defRPr sz="1200" kern="1200">
+        <a:solidFill>
+          <a:schemeClr val="tx1"/>
+        </a:solidFill>
+        <a:latin typeface="+mn-lt"/>
+        <a:ea typeface="+mn-ea"/>
+        <a:cs typeface="+mn-cs"/>
+      </a:defRPr>
+    </a:lvl8pPr>
+    <a:lvl9pPr marL="3657600" algn="l" defTabSz="914400" rtl="0" eaLnBrk="1" latinLnBrk="0" hangingPunct="1">
+      <a:defRPr sz="1200" kern="1200">
+        <a:solidFill>
+          <a:schemeClr val="tx1"/>
+        </a:solidFill>
+        <a:latin typeface="+mn-lt"/>
+        <a:ea typeface="+mn-ea"/>
+        <a:cs typeface="+mn-cs"/>
+      </a:defRPr>
+    </a:lvl9pPr>
+  </p:notesStyle>
+</p:notesMaster>
+</file>
+
+<file path=ppt/notesSlides/notesSlide1.xml><?xml version="1.0" encoding="utf-8"?>
+<p:notes xmlns:a="http://schemas.openxmlformats.org/drawingml/2006/main" xmlns:r="http://schemas.openxmlformats.org/officeDocument/2006/relationships" xmlns:p="http://schemas.openxmlformats.org/presentationml/2006/main">
+  <p:cSld>
+    <p:spTree>
+      <p:nvGrpSpPr>
+        <p:cNvPr id="1" name=""/>
+        <p:cNvGrpSpPr/>
+        <p:nvPr/>
+      </p:nvGrpSpPr>
+      <p:grpSpPr>
+        <a:xfrm>
+          <a:off x="0" y="0"/>
+          <a:ext cx="0" cy="0"/>
+          <a:chOff x="0" y="0"/>
+          <a:chExt cx="0" cy="0"/>
+        </a:xfrm>
+      </p:grpSpPr>
+      <p:sp>
+        <p:nvSpPr>
+          <p:cNvPr id="2" name="Slide Image Placeholder 1"/>
+          <p:cNvSpPr>
+            <a:spLocks noGrp="1" noRot="1" noChangeAspect="1"/>
+          </p:cNvSpPr>
+          <p:nvPr>
+            <p:ph type="sldImg"/>
+          </p:nvPr>
+        </p:nvSpPr>
+        <p:spPr/>
+      </p:sp>
+      <p:sp>
+        <p:nvSpPr>
+          <p:cNvPr id="3" name="Notes Placeholder 2"/>
+          <p:cNvSpPr>
+            <a:spLocks noGrp="1"/>
+          </p:cNvSpPr>
+          <p:nvPr>
+            <p:ph type="body" idx="1"/>
+          </p:nvPr>
+        </p:nvSpPr>
+        <p:spPr/>
+        <p:txBody>
+          <a:bodyPr/>
+          <a:lstStyle/>
+          <a:p>
+            <a:endParaRPr lang="en-US" dirty="0"/>
+          </a:p>
+        </p:txBody>
+      </p:sp>
+      <p:sp>
+        <p:nvSpPr>
+          <p:cNvPr id="4" name="Slide Number Placeholder 3"/>
+          <p:cNvSpPr>
+            <a:spLocks noGrp="1"/>
+          </p:cNvSpPr>
+          <p:nvPr>
+            <p:ph type="sldNum" sz="quarter" idx="5"/>
+          </p:nvPr>
+        </p:nvSpPr>
+        <p:spPr/>
+        <p:txBody>
+          <a:bodyPr/>
+          <a:lstStyle/>
+          <a:p>
+            <a:fld id="{9F0CB708-9F47-034E-9DD6-7E4FB23B5C1B}" type="slidenum">
+              <a:rPr lang="en-US" smtClean="0"/>
+              <a:t>1</a:t>
+            </a:fld>
+            <a:endParaRPr lang="en-US"/>
+          </a:p>
+        </p:txBody>
+      </p:sp>
+    </p:spTree>
+    <p:extLst>
+      <p:ext uri="{BB962C8B-B14F-4D97-AF65-F5344CB8AC3E}">
+        <p14:creationId xmlns:p14="http://schemas.microsoft.com/office/powerpoint/2010/main" val="208064740"/>
+      </p:ext>
+    </p:extLst>
+  </p:cSld>
+  <p:clrMapOvr>
+    <a:masterClrMapping/>
+  </p:clrMapOvr>
+</p:notes>
+</file>
+
 <file path=ppt/slideLayouts/slideLayout1.xml><?xml version="1.0" encoding="utf-8"?>
 <p:sldLayout xmlns:a="http://schemas.openxmlformats.org/drawingml/2006/main" xmlns:r="http://schemas.openxmlformats.org/officeDocument/2006/relationships" xmlns:p="http://schemas.openxmlformats.org/presentationml/2006/main" type="title" preserve="1">
   <p:cSld name="Title Slide">
@@ -318,7 +755,7 @@
             </a:pPr>
             <a:fld id="{D6F3A803-A045-354B-887A-01433CE46FC2}" type="datetime1">
               <a:rPr lang="en-US" smtClean="0"/>
-              <a:t>4/16/26</a:t>
+              <a:t>4/21/26</a:t>
             </a:fld>
             <a:endParaRPr lang="en-US"/>
           </a:p>
@@ -511,7 +948,7 @@
             </a:pPr>
             <a:fld id="{A8B33C1D-C2E2-1049-AA3F-CD6E91052752}" type="datetime1">
               <a:rPr lang="en-US" smtClean="0"/>
-              <a:t>4/16/26</a:t>
+              <a:t>4/21/26</a:t>
             </a:fld>
             <a:endParaRPr lang="en-US"/>
           </a:p>
@@ -713,7 +1150,7 @@
             </a:pPr>
             <a:fld id="{2791AD68-B60C-4542-BDDD-2074DE6DE828}" type="datetime1">
               <a:rPr lang="en-US" smtClean="0"/>
-              <a:t>4/16/26</a:t>
+              <a:t>4/21/26</a:t>
             </a:fld>
             <a:endParaRPr lang="en-US"/>
           </a:p>
@@ -920,7 +1357,7 @@
             </a:pPr>
             <a:fld id="{C5BD04BF-9DC2-6341-92B2-BD109A2EF3B1}" type="datetime1">
               <a:rPr lang="en-US" smtClean="0"/>
-              <a:t>4/16/26</a:t>
+              <a:t>4/21/26</a:t>
             </a:fld>
             <a:endParaRPr lang="en-US"/>
           </a:p>
@@ -1190,7 +1627,7 @@
             </a:pPr>
             <a:fld id="{FB0FFBC7-3028-644D-986B-D9855CB74B38}" type="datetime1">
               <a:rPr lang="en-US" smtClean="0"/>
-              <a:t>4/16/26</a:t>
+              <a:t>4/21/26</a:t>
             </a:fld>
             <a:endParaRPr lang="en-US"/>
           </a:p>
@@ -1510,7 +1947,7 @@
             </a:pPr>
             <a:fld id="{2C3B8AE4-01F5-CC42-9C62-61BC6528368B}" type="datetime1">
               <a:rPr lang="en-US" smtClean="0"/>
-              <a:t>4/16/26</a:t>
+              <a:t>4/21/26</a:t>
             </a:fld>
             <a:endParaRPr lang="en-US"/>
           </a:p>
@@ -1958,7 +2395,7 @@
             </a:pPr>
             <a:fld id="{77E49314-4A78-2444-9569-44EB70168344}" type="datetime1">
               <a:rPr lang="en-US" smtClean="0"/>
-              <a:t>4/16/26</a:t>
+              <a:t>4/21/26</a:t>
             </a:fld>
             <a:endParaRPr lang="en-US"/>
           </a:p>
@@ -2108,7 +2545,7 @@
             </a:pPr>
             <a:fld id="{5BC22837-4683-B242-B000-BCEE30621787}" type="datetime1">
               <a:rPr lang="en-US" smtClean="0"/>
-              <a:t>4/16/26</a:t>
+              <a:t>4/21/26</a:t>
             </a:fld>
             <a:endParaRPr lang="en-US"/>
           </a:p>
@@ -2227,7 +2664,7 @@
             </a:pPr>
             <a:fld id="{DCDAE926-7EF1-0B40-B57E-417D188A609C}" type="datetime1">
               <a:rPr lang="en-US" smtClean="0"/>
-              <a:t>4/16/26</a:t>
+              <a:t>4/21/26</a:t>
             </a:fld>
             <a:endParaRPr lang="en-US"/>
           </a:p>
@@ -2526,7 +2963,7 @@
             </a:pPr>
             <a:fld id="{518D107B-B9C7-5B41-A168-55258AB95F52}" type="datetime1">
               <a:rPr lang="en-US" smtClean="0"/>
-              <a:t>4/16/26</a:t>
+              <a:t>4/21/26</a:t>
             </a:fld>
             <a:endParaRPr lang="en-US"/>
           </a:p>
@@ -2810,7 +3247,7 @@
             </a:pPr>
             <a:fld id="{3AD92D36-EE82-3142-B011-9831FB5E702F}" type="datetime1">
               <a:rPr lang="en-US" smtClean="0"/>
-              <a:t>4/16/26</a:t>
+              <a:t>4/21/26</a:t>
             </a:fld>
             <a:endParaRPr lang="en-US"/>
           </a:p>
@@ -2951,7 +3388,7 @@
               </a14:hiddenLine>
             </a:ext>
             <a:ext uri="{FAA26D3D-D897-4be2-8F04-BA451C77F1D7}">
-              <ma14:placeholderFlag xmlns="" xmlns:ma14="http://schemas.microsoft.com/office/mac/drawingml/2011/main" val="1"/>
+              <ma14:placeholderFlag xmlns:ma14="http://schemas.microsoft.com/office/mac/drawingml/2011/main" xmlns="" val="1"/>
             </a:ext>
           </a:extLst>
         </p:spPr>
@@ -3019,7 +3456,7 @@
               </a14:hiddenLine>
             </a:ext>
             <a:ext uri="{FAA26D3D-D897-4be2-8F04-BA451C77F1D7}">
-              <ma14:placeholderFlag xmlns="" xmlns:ma14="http://schemas.microsoft.com/office/mac/drawingml/2011/main" val="1"/>
+              <ma14:placeholderFlag xmlns:ma14="http://schemas.microsoft.com/office/mac/drawingml/2011/main" xmlns="" val="1"/>
             </a:ext>
           </a:extLst>
         </p:spPr>
@@ -3115,7 +3552,7 @@
             </a:pPr>
             <a:fld id="{3EE08B4B-7256-494F-A90D-3891BD685F4A}" type="datetime1">
               <a:rPr lang="en-US" smtClean="0"/>
-              <a:t>4/16/26</a:t>
+              <a:t>4/21/26</a:t>
             </a:fld>
             <a:endParaRPr lang="en-US" dirty="0"/>
           </a:p>
@@ -3817,6 +4254,204 @@
           <p:cNvPr id="2" name="Title 1">
             <a:extLst>
               <a:ext uri="{FF2B5EF4-FFF2-40B4-BE49-F238E27FC236}">
+                <a16:creationId xmlns:a16="http://schemas.microsoft.com/office/drawing/2014/main" id="{5DA4B22D-5AD2-0C01-57FF-9D8E0229C6FE}"/>
+              </a:ext>
+            </a:extLst>
+          </p:cNvPr>
+          <p:cNvSpPr>
+            <a:spLocks noGrp="1"/>
+          </p:cNvSpPr>
+          <p:nvPr>
+            <p:ph type="title"/>
+          </p:nvPr>
+        </p:nvSpPr>
+        <p:spPr/>
+        <p:txBody>
+          <a:bodyPr/>
+          <a:lstStyle/>
+          <a:p>
+            <a:r>
+              <a:rPr lang="en-US" dirty="0"/>
+              <a:t>O/M Ratio</a:t>
+            </a:r>
+          </a:p>
+        </p:txBody>
+      </p:sp>
+      <p:sp>
+        <p:nvSpPr>
+          <p:cNvPr id="3" name="Content Placeholder 2">
+            <a:extLst>
+              <a:ext uri="{FF2B5EF4-FFF2-40B4-BE49-F238E27FC236}">
+                <a16:creationId xmlns:a16="http://schemas.microsoft.com/office/drawing/2014/main" id="{BB118308-AF23-B971-2B1A-ECBD5680B7C1}"/>
+              </a:ext>
+            </a:extLst>
+          </p:cNvPr>
+          <p:cNvSpPr>
+            <a:spLocks noGrp="1"/>
+          </p:cNvSpPr>
+          <p:nvPr>
+            <p:ph idx="1"/>
+          </p:nvPr>
+        </p:nvSpPr>
+        <p:spPr>
+          <a:xfrm>
+            <a:off x="609600" y="1838739"/>
+            <a:ext cx="5862638" cy="4287426"/>
+          </a:xfrm>
+        </p:spPr>
+        <p:txBody>
+          <a:bodyPr/>
+          <a:lstStyle/>
+          <a:p>
+            <a:r>
+              <a:rPr lang="en-US" dirty="0"/>
+              <a:t>Fission releases two oxygen atoms, which cannot be fully bound by the fission products, this increases the O potential in the fuel as dissolved O</a:t>
+            </a:r>
+          </a:p>
+          <a:p>
+            <a:r>
+              <a:rPr lang="en-US" dirty="0"/>
+              <a:t>The O potential increases until the point where Mo starts to oxidize, leaving the metallic inclusions</a:t>
+            </a:r>
+          </a:p>
+          <a:p>
+            <a:r>
+              <a:rPr lang="en-US" dirty="0"/>
+              <a:t>The O/M ratio increases until Mo starts to oxidize, then maintains at approximately 2.0 or thereabouts</a:t>
+            </a:r>
+          </a:p>
+        </p:txBody>
+      </p:sp>
+      <p:sp>
+        <p:nvSpPr>
+          <p:cNvPr id="4" name="Slide Number Placeholder 3">
+            <a:extLst>
+              <a:ext uri="{FF2B5EF4-FFF2-40B4-BE49-F238E27FC236}">
+                <a16:creationId xmlns:a16="http://schemas.microsoft.com/office/drawing/2014/main" id="{09AFC33D-A569-C085-55CF-C662BA30B006}"/>
+              </a:ext>
+            </a:extLst>
+          </p:cNvPr>
+          <p:cNvSpPr>
+            <a:spLocks noGrp="1"/>
+          </p:cNvSpPr>
+          <p:nvPr>
+            <p:ph type="sldNum" sz="quarter" idx="12"/>
+          </p:nvPr>
+        </p:nvSpPr>
+        <p:spPr/>
+        <p:txBody>
+          <a:bodyPr/>
+          <a:lstStyle/>
+          <a:p>
+            <a:pPr>
+              <a:defRPr/>
+            </a:pPr>
+            <a:fld id="{3FF2C605-4958-CF43-AA48-80339EFDB0AF}" type="slidenum">
+              <a:rPr lang="en-US" smtClean="0"/>
+              <a:pPr>
+                <a:defRPr/>
+              </a:pPr>
+              <a:t>10</a:t>
+            </a:fld>
+            <a:endParaRPr lang="en-US"/>
+          </a:p>
+        </p:txBody>
+      </p:sp>
+      <p:pic>
+        <p:nvPicPr>
+          <p:cNvPr id="5" name="Picture 4">
+            <a:extLst>
+              <a:ext uri="{FF2B5EF4-FFF2-40B4-BE49-F238E27FC236}">
+                <a16:creationId xmlns:a16="http://schemas.microsoft.com/office/drawing/2014/main" id="{A9E9DAD9-5332-5810-12F7-17AE61FDF0E7}"/>
+              </a:ext>
+            </a:extLst>
+          </p:cNvPr>
+          <p:cNvPicPr>
+            <a:picLocks noChangeAspect="1"/>
+          </p:cNvPicPr>
+          <p:nvPr/>
+        </p:nvPicPr>
+        <p:blipFill>
+          <a:blip r:embed="rId2"/>
+          <a:stretch>
+            <a:fillRect/>
+          </a:stretch>
+        </p:blipFill>
+        <p:spPr>
+          <a:xfrm>
+            <a:off x="6654680" y="3822701"/>
+            <a:ext cx="5327769" cy="2533650"/>
+          </a:xfrm>
+          <a:prstGeom prst="rect">
+            <a:avLst/>
+          </a:prstGeom>
+        </p:spPr>
+      </p:pic>
+      <p:pic>
+        <p:nvPicPr>
+          <p:cNvPr id="6" name="Picture 5">
+            <a:extLst>
+              <a:ext uri="{FF2B5EF4-FFF2-40B4-BE49-F238E27FC236}">
+                <a16:creationId xmlns:a16="http://schemas.microsoft.com/office/drawing/2014/main" id="{ABB42B93-F59E-5375-D773-FDC1EDAFFA1F}"/>
+              </a:ext>
+            </a:extLst>
+          </p:cNvPr>
+          <p:cNvPicPr>
+            <a:picLocks noChangeAspect="1"/>
+          </p:cNvPicPr>
+          <p:nvPr/>
+        </p:nvPicPr>
+        <p:blipFill>
+          <a:blip r:embed="rId3"/>
+          <a:stretch>
+            <a:fillRect/>
+          </a:stretch>
+        </p:blipFill>
+        <p:spPr>
+          <a:xfrm>
+            <a:off x="7184964" y="1122363"/>
+            <a:ext cx="4267200" cy="2569803"/>
+          </a:xfrm>
+          <a:prstGeom prst="rect">
+            <a:avLst/>
+          </a:prstGeom>
+        </p:spPr>
+      </p:pic>
+    </p:spTree>
+    <p:extLst>
+      <p:ext uri="{BB962C8B-B14F-4D97-AF65-F5344CB8AC3E}">
+        <p14:creationId xmlns:p14="http://schemas.microsoft.com/office/powerpoint/2010/main" val="109773984"/>
+      </p:ext>
+    </p:extLst>
+  </p:cSld>
+  <p:clrMapOvr>
+    <a:masterClrMapping/>
+  </p:clrMapOvr>
+</p:sld>
+</file>
+
+<file path=ppt/slides/slide11.xml><?xml version="1.0" encoding="utf-8"?>
+<p:sld xmlns:a="http://schemas.openxmlformats.org/drawingml/2006/main" xmlns:r="http://schemas.openxmlformats.org/officeDocument/2006/relationships" xmlns:p="http://schemas.openxmlformats.org/presentationml/2006/main">
+  <p:cSld>
+    <p:spTree>
+      <p:nvGrpSpPr>
+        <p:cNvPr id="1" name=""/>
+        <p:cNvGrpSpPr/>
+        <p:nvPr/>
+      </p:nvGrpSpPr>
+      <p:grpSpPr>
+        <a:xfrm>
+          <a:off x="0" y="0"/>
+          <a:ext cx="0" cy="0"/>
+          <a:chOff x="0" y="0"/>
+          <a:chExt cx="0" cy="0"/>
+        </a:xfrm>
+      </p:grpSpPr>
+      <p:sp>
+        <p:nvSpPr>
+          <p:cNvPr id="2" name="Title 1">
+            <a:extLst>
+              <a:ext uri="{FF2B5EF4-FFF2-40B4-BE49-F238E27FC236}">
                 <a16:creationId xmlns:a16="http://schemas.microsoft.com/office/drawing/2014/main" id="{E2164EAE-20B9-B549-A7DA-DFD62A7D100E}"/>
               </a:ext>
             </a:extLst>
@@ -3874,8 +4509,8 @@
         </p:nvSpPr>
         <p:spPr>
           <a:xfrm>
-            <a:off x="609599" y="2160495"/>
-            <a:ext cx="7580243" cy="3965670"/>
+            <a:off x="609599" y="1828800"/>
+            <a:ext cx="7580243" cy="4297365"/>
           </a:xfrm>
         </p:spPr>
         <p:txBody>
@@ -3955,7 +4590,7 @@
               <a:pPr>
                 <a:defRPr/>
               </a:pPr>
-              <a:t>10</a:t>
+              <a:t>11</a:t>
             </a:fld>
             <a:endParaRPr lang="en-US"/>
           </a:p>
@@ -4004,148 +4639,6 @@
 </p:sld>
 </file>
 
-<file path=ppt/slides/slide11.xml><?xml version="1.0" encoding="utf-8"?>
-<p:sld xmlns:a="http://schemas.openxmlformats.org/drawingml/2006/main" xmlns:r="http://schemas.openxmlformats.org/officeDocument/2006/relationships" xmlns:p="http://schemas.openxmlformats.org/presentationml/2006/main">
-  <p:cSld>
-    <p:spTree>
-      <p:nvGrpSpPr>
-        <p:cNvPr id="1" name=""/>
-        <p:cNvGrpSpPr/>
-        <p:nvPr/>
-      </p:nvGrpSpPr>
-      <p:grpSpPr>
-        <a:xfrm>
-          <a:off x="0" y="0"/>
-          <a:ext cx="0" cy="0"/>
-          <a:chOff x="0" y="0"/>
-          <a:chExt cx="0" cy="0"/>
-        </a:xfrm>
-      </p:grpSpPr>
-      <p:sp>
-        <p:nvSpPr>
-          <p:cNvPr id="2" name="Title 1">
-            <a:extLst>
-              <a:ext uri="{FF2B5EF4-FFF2-40B4-BE49-F238E27FC236}">
-                <a16:creationId xmlns:a16="http://schemas.microsoft.com/office/drawing/2014/main" id="{F45A425F-8E9C-D30D-1FE5-BC108D251A71}"/>
-              </a:ext>
-            </a:extLst>
-          </p:cNvPr>
-          <p:cNvSpPr>
-            <a:spLocks noGrp="1"/>
-          </p:cNvSpPr>
-          <p:nvPr>
-            <p:ph type="title"/>
-          </p:nvPr>
-        </p:nvSpPr>
-        <p:spPr/>
-        <p:txBody>
-          <a:bodyPr/>
-          <a:lstStyle/>
-          <a:p>
-            <a:r>
-              <a:rPr lang="en-US" dirty="0"/>
-              <a:t>JOG Effects</a:t>
-            </a:r>
-          </a:p>
-        </p:txBody>
-      </p:sp>
-      <p:sp>
-        <p:nvSpPr>
-          <p:cNvPr id="3" name="Content Placeholder 2">
-            <a:extLst>
-              <a:ext uri="{FF2B5EF4-FFF2-40B4-BE49-F238E27FC236}">
-                <a16:creationId xmlns:a16="http://schemas.microsoft.com/office/drawing/2014/main" id="{FC20B2AA-377A-232F-6AB3-1D169B593F17}"/>
-              </a:ext>
-            </a:extLst>
-          </p:cNvPr>
-          <p:cNvSpPr>
-            <a:spLocks noGrp="1"/>
-          </p:cNvSpPr>
-          <p:nvPr>
-            <p:ph idx="1"/>
-          </p:nvPr>
-        </p:nvSpPr>
-        <p:spPr/>
-        <p:txBody>
-          <a:bodyPr/>
-          <a:lstStyle/>
-          <a:p>
-            <a:r>
-              <a:rPr lang="en-US" dirty="0"/>
-              <a:t>The thermal conductivity of Cs2MoO4 is about 10x lower than MOX fuel, but much higher than gases</a:t>
-            </a:r>
-          </a:p>
-          <a:p>
-            <a:r>
-              <a:rPr lang="en-US" dirty="0"/>
-              <a:t>JOG acts as a mechanical buffer, limiting the amount of PCMI, or stresses in the cladding</a:t>
-            </a:r>
-          </a:p>
-          <a:p>
-            <a:r>
-              <a:rPr lang="en-US" dirty="0"/>
-              <a:t>JOG reduces fuel swelling, by allowing fission products to leave the fuel into a preferable chemical state</a:t>
-            </a:r>
-          </a:p>
-          <a:p>
-            <a:r>
-              <a:rPr lang="en-US" sz="2400" dirty="0"/>
-              <a:t>Fission products in the JOG play a predominant role on FCCI and on the resulting strong corrosion</a:t>
-            </a:r>
-          </a:p>
-          <a:p>
-            <a:endParaRPr lang="en-US" dirty="0"/>
-          </a:p>
-        </p:txBody>
-      </p:sp>
-      <p:sp>
-        <p:nvSpPr>
-          <p:cNvPr id="4" name="Slide Number Placeholder 3">
-            <a:extLst>
-              <a:ext uri="{FF2B5EF4-FFF2-40B4-BE49-F238E27FC236}">
-                <a16:creationId xmlns:a16="http://schemas.microsoft.com/office/drawing/2014/main" id="{10990C67-4165-EC70-CB6D-FBF4AF1831FD}"/>
-              </a:ext>
-            </a:extLst>
-          </p:cNvPr>
-          <p:cNvSpPr>
-            <a:spLocks noGrp="1"/>
-          </p:cNvSpPr>
-          <p:nvPr>
-            <p:ph type="sldNum" sz="quarter" idx="12"/>
-          </p:nvPr>
-        </p:nvSpPr>
-        <p:spPr/>
-        <p:txBody>
-          <a:bodyPr/>
-          <a:lstStyle/>
-          <a:p>
-            <a:pPr>
-              <a:defRPr/>
-            </a:pPr>
-            <a:fld id="{3FF2C605-4958-CF43-AA48-80339EFDB0AF}" type="slidenum">
-              <a:rPr lang="en-US" smtClean="0"/>
-              <a:pPr>
-                <a:defRPr/>
-              </a:pPr>
-              <a:t>11</a:t>
-            </a:fld>
-            <a:endParaRPr lang="en-US"/>
-          </a:p>
-        </p:txBody>
-      </p:sp>
-    </p:spTree>
-    <p:extLst>
-      <p:ext uri="{BB962C8B-B14F-4D97-AF65-F5344CB8AC3E}">
-        <p14:creationId xmlns:p14="http://schemas.microsoft.com/office/powerpoint/2010/main" val="2992103709"/>
-      </p:ext>
-    </p:extLst>
-  </p:cSld>
-  <p:clrMapOvr>
-    <a:masterClrMapping/>
-  </p:clrMapOvr>
-</p:sld>
-</file>
-
 <file path=ppt/slides/slide12.xml><?xml version="1.0" encoding="utf-8"?>
 <p:sld xmlns:a="http://schemas.openxmlformats.org/drawingml/2006/main" xmlns:r="http://schemas.openxmlformats.org/officeDocument/2006/relationships" xmlns:p="http://schemas.openxmlformats.org/presentationml/2006/main">
   <p:cSld>
@@ -4168,7 +4661,7 @@
           <p:cNvPr id="2" name="Title 1">
             <a:extLst>
               <a:ext uri="{FF2B5EF4-FFF2-40B4-BE49-F238E27FC236}">
-                <a16:creationId xmlns:a16="http://schemas.microsoft.com/office/drawing/2014/main" id="{E8F1A47C-C694-DA43-8432-71F3AF7F6282}"/>
+                <a16:creationId xmlns:a16="http://schemas.microsoft.com/office/drawing/2014/main" id="{F45A425F-8E9C-D30D-1FE5-BC108D251A71}"/>
               </a:ext>
             </a:extLst>
           </p:cNvPr>
@@ -4186,7 +4679,7 @@
           <a:p>
             <a:r>
               <a:rPr lang="en-US" dirty="0"/>
-              <a:t>FCCI</a:t>
+              <a:t>JOG Effects</a:t>
             </a:r>
           </a:p>
         </p:txBody>
@@ -4196,7 +4689,7 @@
           <p:cNvPr id="3" name="Content Placeholder 2">
             <a:extLst>
               <a:ext uri="{FF2B5EF4-FFF2-40B4-BE49-F238E27FC236}">
-                <a16:creationId xmlns:a16="http://schemas.microsoft.com/office/drawing/2014/main" id="{9FC294B9-479B-F34A-8CBE-9E4E07028E82}"/>
+                <a16:creationId xmlns:a16="http://schemas.microsoft.com/office/drawing/2014/main" id="{FC20B2AA-377A-232F-6AB3-1D169B593F17}"/>
               </a:ext>
             </a:extLst>
           </p:cNvPr>
@@ -4213,41 +4706,30 @@
           <a:lstStyle/>
           <a:p>
             <a:r>
-              <a:rPr lang="en-US" sz="2000" dirty="0"/>
-              <a:t>FCCI appears as one of the potential life-limiting factors for high burnup fuel elements</a:t>
-            </a:r>
-          </a:p>
-          <a:p>
-            <a:r>
-              <a:rPr lang="en-US" sz="2000" dirty="0"/>
-              <a:t>The (</a:t>
-            </a:r>
-            <a:r>
-              <a:rPr lang="en-US" sz="2000" dirty="0" err="1"/>
-              <a:t>U,Pu</a:t>
-            </a:r>
-            <a:r>
-              <a:rPr lang="en-US" sz="2000" dirty="0"/>
-              <a:t>)O2 fuel itself does not directly react with the cladding, but it provides the oxygen needed for some of the reactions</a:t>
-            </a:r>
-          </a:p>
-          <a:p>
-            <a:r>
-              <a:rPr lang="en-US" sz="2000" dirty="0"/>
-              <a:t>Volatile fission products, tellurium and cesium, are the corrosive species able to overcome the passivation of stainless steel and therefore to induce clad corrosion</a:t>
-            </a:r>
-          </a:p>
-          <a:p>
-            <a:r>
-              <a:rPr lang="en-US" sz="2000" dirty="0"/>
-              <a:t>Several types of corrosion reactions and mechanisms are possible, occurring at different stages of irradiation, sometimes successively in the same pin, and resulting in different attack features</a:t>
-            </a:r>
-          </a:p>
-          <a:p>
-            <a:r>
-              <a:rPr lang="en-US" sz="2000" dirty="0"/>
-              <a:t>Thus, a qualitative understanding of corrosion mechanisms has been achieved, but it is not yet possible to give a complete physical description of FCCI and to predict corrosion depths</a:t>
-            </a:r>
+              <a:rPr lang="en-US" dirty="0"/>
+              <a:t>The thermal conductivity of Cs2MoO4 is about 10x lower than MOX fuel, but much higher than gases</a:t>
+            </a:r>
+          </a:p>
+          <a:p>
+            <a:r>
+              <a:rPr lang="en-US" dirty="0"/>
+              <a:t>JOG acts as a mechanical buffer, limiting the amount of PCMI, or stresses in the cladding</a:t>
+            </a:r>
+          </a:p>
+          <a:p>
+            <a:r>
+              <a:rPr lang="en-US" dirty="0"/>
+              <a:t>JOG reduces fuel swelling, by allowing fission products to leave the fuel into a preferable chemical state</a:t>
+            </a:r>
+          </a:p>
+          <a:p>
+            <a:r>
+              <a:rPr lang="en-US" sz="2400" dirty="0"/>
+              <a:t>Fission products in the JOG play a predominant role on FCCI and on the resulting strong corrosion</a:t>
+            </a:r>
+          </a:p>
+          <a:p>
+            <a:endParaRPr lang="en-US" dirty="0"/>
           </a:p>
         </p:txBody>
       </p:sp>
@@ -4256,7 +4738,7 @@
           <p:cNvPr id="4" name="Slide Number Placeholder 3">
             <a:extLst>
               <a:ext uri="{FF2B5EF4-FFF2-40B4-BE49-F238E27FC236}">
-                <a16:creationId xmlns:a16="http://schemas.microsoft.com/office/drawing/2014/main" id="{5E085311-B9B6-DD4E-83E1-FD3CD6A5F343}"/>
+                <a16:creationId xmlns:a16="http://schemas.microsoft.com/office/drawing/2014/main" id="{10990C67-4165-EC70-CB6D-FBF4AF1831FD}"/>
               </a:ext>
             </a:extLst>
           </p:cNvPr>
@@ -4289,7 +4771,7 @@
     </p:spTree>
     <p:extLst>
       <p:ext uri="{BB962C8B-B14F-4D97-AF65-F5344CB8AC3E}">
-        <p14:creationId xmlns:p14="http://schemas.microsoft.com/office/powerpoint/2010/main" val="2683647942"/>
+        <p14:creationId xmlns:p14="http://schemas.microsoft.com/office/powerpoint/2010/main" val="2992103709"/>
       </p:ext>
     </p:extLst>
   </p:cSld>
@@ -4321,7 +4803,7 @@
           <p:cNvPr id="2" name="Title 1">
             <a:extLst>
               <a:ext uri="{FF2B5EF4-FFF2-40B4-BE49-F238E27FC236}">
-                <a16:creationId xmlns:a16="http://schemas.microsoft.com/office/drawing/2014/main" id="{6E9591DB-2E4B-6AF8-FF23-B9CF67F0B134}"/>
+                <a16:creationId xmlns:a16="http://schemas.microsoft.com/office/drawing/2014/main" id="{E8F1A47C-C694-DA43-8432-71F3AF7F6282}"/>
               </a:ext>
             </a:extLst>
           </p:cNvPr>
@@ -4339,7 +4821,7 @@
           <a:p>
             <a:r>
               <a:rPr lang="en-US" dirty="0"/>
-              <a:t>Accidents/Transients in MOX SFRs</a:t>
+              <a:t>FCCI</a:t>
             </a:r>
           </a:p>
         </p:txBody>
@@ -4349,7 +4831,7 @@
           <p:cNvPr id="3" name="Content Placeholder 2">
             <a:extLst>
               <a:ext uri="{FF2B5EF4-FFF2-40B4-BE49-F238E27FC236}">
-                <a16:creationId xmlns:a16="http://schemas.microsoft.com/office/drawing/2014/main" id="{08F1445C-EEAA-B0B4-3C59-44C62E3954E4}"/>
+                <a16:creationId xmlns:a16="http://schemas.microsoft.com/office/drawing/2014/main" id="{9FC294B9-479B-F34A-8CBE-9E4E07028E82}"/>
               </a:ext>
             </a:extLst>
           </p:cNvPr>
@@ -4366,37 +4848,41 @@
           <a:lstStyle/>
           <a:p>
             <a:r>
-              <a:rPr lang="en-US" dirty="0"/>
-              <a:t>For sodium fast reactors three main types of transient and accident scenarios are considered as references for the study of fuel transient and accident behavior:</a:t>
-            </a:r>
-          </a:p>
-          <a:p>
-            <a:pPr lvl="1"/>
-            <a:r>
-              <a:rPr lang="en-US" dirty="0"/>
-              <a:t>the slow power transient representative of one control-rod withdrawal</a:t>
-            </a:r>
-          </a:p>
-          <a:p>
-            <a:pPr lvl="1"/>
-            <a:r>
-              <a:rPr lang="en-US" dirty="0"/>
-              <a:t>the loss of cooling due to blockage of a subassembly</a:t>
-            </a:r>
-          </a:p>
-          <a:p>
-            <a:pPr lvl="1"/>
-            <a:r>
-              <a:rPr lang="en-US" dirty="0"/>
-              <a:t>the unprotected loss of flow (ULOF) accident that might lead to a core disruptive accident</a:t>
-            </a:r>
-          </a:p>
-          <a:p>
-            <a:pPr lvl="1"/>
-            <a:endParaRPr lang="en-US" dirty="0"/>
-          </a:p>
-          <a:p>
-            <a:endParaRPr lang="en-US" dirty="0"/>
+              <a:rPr lang="en-US" sz="2000" dirty="0"/>
+              <a:t>FCCI appears as one of the potential life-limiting factors for high burnup fuel elements</a:t>
+            </a:r>
+          </a:p>
+          <a:p>
+            <a:r>
+              <a:rPr lang="en-US" sz="2000" dirty="0"/>
+              <a:t>The (</a:t>
+            </a:r>
+            <a:r>
+              <a:rPr lang="en-US" sz="2000" dirty="0" err="1"/>
+              <a:t>U,Pu</a:t>
+            </a:r>
+            <a:r>
+              <a:rPr lang="en-US" sz="2000" dirty="0"/>
+              <a:t>)O2 fuel itself does not directly react with the cladding, but it provides the oxygen needed for some of the reactions</a:t>
+            </a:r>
+          </a:p>
+          <a:p>
+            <a:r>
+              <a:rPr lang="en-US" sz="2000" dirty="0"/>
+              <a:t>Volatile fission products, tellurium and cesium, are the corrosive species able to overcome the passivation of stainless steel and therefore to induce cladding corrosion</a:t>
+            </a:r>
+          </a:p>
+          <a:p>
+            <a:r>
+              <a:rPr lang="en-US" sz="2000" dirty="0"/>
+              <a:t>Several types of corrosion reactions and mechanisms are possible, occurring at different stages of irradiation, sometimes successively in the same pin, and resulting in different attack features</a:t>
+            </a:r>
+          </a:p>
+          <a:p>
+            <a:r>
+              <a:rPr lang="en-US" sz="2000" dirty="0"/>
+              <a:t>Thus, a qualitative understanding of corrosion mechanisms has been achieved, but it is not yet possible to give a complete physical description of FCCI and to predict corrosion depths</a:t>
+            </a:r>
           </a:p>
         </p:txBody>
       </p:sp>
@@ -4405,7 +4891,7 @@
           <p:cNvPr id="4" name="Slide Number Placeholder 3">
             <a:extLst>
               <a:ext uri="{FF2B5EF4-FFF2-40B4-BE49-F238E27FC236}">
-                <a16:creationId xmlns:a16="http://schemas.microsoft.com/office/drawing/2014/main" id="{39CE3405-7C0B-F41F-1F55-5F2AFE449F8E}"/>
+                <a16:creationId xmlns:a16="http://schemas.microsoft.com/office/drawing/2014/main" id="{5E085311-B9B6-DD4E-83E1-FD3CD6A5F343}"/>
               </a:ext>
             </a:extLst>
           </p:cNvPr>
@@ -4438,7 +4924,7 @@
     </p:spTree>
     <p:extLst>
       <p:ext uri="{BB962C8B-B14F-4D97-AF65-F5344CB8AC3E}">
-        <p14:creationId xmlns:p14="http://schemas.microsoft.com/office/powerpoint/2010/main" val="2940466563"/>
+        <p14:creationId xmlns:p14="http://schemas.microsoft.com/office/powerpoint/2010/main" val="2683647942"/>
       </p:ext>
     </p:extLst>
   </p:cSld>
@@ -4470,7 +4956,7 @@
           <p:cNvPr id="2" name="Title 1">
             <a:extLst>
               <a:ext uri="{FF2B5EF4-FFF2-40B4-BE49-F238E27FC236}">
-                <a16:creationId xmlns:a16="http://schemas.microsoft.com/office/drawing/2014/main" id="{81AEA03C-268C-9934-0DFE-4D72965F46D9}"/>
+                <a16:creationId xmlns:a16="http://schemas.microsoft.com/office/drawing/2014/main" id="{EB3A9720-F78D-4E3B-EEA0-BB0C2F336AAD}"/>
               </a:ext>
             </a:extLst>
           </p:cNvPr>
@@ -4488,7 +4974,7 @@
           <a:p>
             <a:r>
               <a:rPr lang="en-US" dirty="0"/>
-              <a:t>Control Rod Withdrawal Accident (CRWA)</a:t>
+              <a:t>Fuel Melting</a:t>
             </a:r>
           </a:p>
         </p:txBody>
@@ -4498,7 +4984,7 @@
           <p:cNvPr id="3" name="Content Placeholder 2">
             <a:extLst>
               <a:ext uri="{FF2B5EF4-FFF2-40B4-BE49-F238E27FC236}">
-                <a16:creationId xmlns:a16="http://schemas.microsoft.com/office/drawing/2014/main" id="{1F686EE3-A36A-0C68-65B3-3D442FE1EC5F}"/>
+                <a16:creationId xmlns:a16="http://schemas.microsoft.com/office/drawing/2014/main" id="{DA254697-C9C4-7A4D-E635-1C855356D9F3}"/>
               </a:ext>
             </a:extLst>
           </p:cNvPr>
@@ -4509,30 +4995,50 @@
             <p:ph idx="1"/>
           </p:nvPr>
         </p:nvSpPr>
-        <p:spPr/>
+        <p:spPr>
+          <a:xfrm>
+            <a:off x="609600" y="1719470"/>
+            <a:ext cx="10972800" cy="4406695"/>
+          </a:xfrm>
+        </p:spPr>
         <p:txBody>
           <a:bodyPr/>
           <a:lstStyle/>
           <a:p>
             <a:r>
               <a:rPr lang="en-US" sz="2000" dirty="0"/>
-              <a:t>Slow power transients due to control-rod withdrawal are the most common transients occurring during reactor operation as they are used for regulation of the core power</a:t>
-            </a:r>
-          </a:p>
-          <a:p>
-            <a:r>
-              <a:rPr lang="en-US" sz="2000" dirty="0"/>
-              <a:t>In case of an inadvertent control-rod withdrawal due to operator action together with a failure of various protection systems, this transient might lead to severe consequences</a:t>
-            </a:r>
-          </a:p>
-          <a:p>
-            <a:r>
-              <a:rPr lang="en-US" sz="2000" dirty="0"/>
-              <a:t>During such a transient, nominal power can increase by 1-3% per second, and may lead to partial fuel melting inside the pins of the subassemblies surrounding the control rod</a:t>
-            </a:r>
-          </a:p>
-          <a:p>
-            <a:endParaRPr lang="en-US" sz="2000" dirty="0"/>
+              <a:t>SFRs with MOX are sensitive to any fuel compaction effect that might result from fuel motion (for instance, due to melting) with the potential risk of prompt-critical events and mechanical energy release to the vessel structure</a:t>
+            </a:r>
+          </a:p>
+          <a:p>
+            <a:r>
+              <a:rPr lang="en-US" sz="2000" dirty="0"/>
+              <a:t>Fuel-melting occurrence depends on pin thermal behavior that is governed by thermal conductivity, heat exchange between fuel and clad through the pellet–clad gap, and melting temperature</a:t>
+            </a:r>
+          </a:p>
+          <a:p>
+            <a:r>
+              <a:rPr lang="en-US" sz="2000" dirty="0"/>
+              <a:t>Melting temperature and thermal conductivity depend on stoichiometry and burnup</a:t>
+            </a:r>
+          </a:p>
+          <a:p>
+            <a:r>
+              <a:rPr lang="en-US" sz="2000" dirty="0"/>
+              <a:t>Heat exchange in the fuel system is governed by evolution of gap thickness and composition</a:t>
+            </a:r>
+          </a:p>
+          <a:p>
+            <a:r>
+              <a:rPr lang="en-US" sz="2000" dirty="0"/>
+              <a:t>High T plastic fuel creep may lead to central hole reduction and to increase of the macroscopic fuel porosity with subsequent reduction of the thermal conductivity and thus higher fuel temperature in the center that results in a lower power at melting onset</a:t>
+            </a:r>
+          </a:p>
+          <a:p>
+            <a:r>
+              <a:rPr lang="en-US" sz="2000" dirty="0"/>
+              <a:t>High peaking factors (~1.3, compared to ~1.1 in LWRs), can increase the local temperatures in high power regions and increase probability of fuel melting</a:t>
+            </a:r>
           </a:p>
           <a:p>
             <a:endParaRPr lang="en-US" sz="2000" dirty="0"/>
@@ -4550,7 +5056,7 @@
           <p:cNvPr id="4" name="Slide Number Placeholder 3">
             <a:extLst>
               <a:ext uri="{FF2B5EF4-FFF2-40B4-BE49-F238E27FC236}">
-                <a16:creationId xmlns:a16="http://schemas.microsoft.com/office/drawing/2014/main" id="{3D652275-E112-394A-DEC9-C5AB7905C93E}"/>
+                <a16:creationId xmlns:a16="http://schemas.microsoft.com/office/drawing/2014/main" id="{B8BA4DDF-D969-B07B-E689-810E07F7F103}"/>
               </a:ext>
             </a:extLst>
           </p:cNvPr>
@@ -4583,7 +5089,7 @@
     </p:spTree>
     <p:extLst>
       <p:ext uri="{BB962C8B-B14F-4D97-AF65-F5344CB8AC3E}">
-        <p14:creationId xmlns:p14="http://schemas.microsoft.com/office/powerpoint/2010/main" val="3012690627"/>
+        <p14:creationId xmlns:p14="http://schemas.microsoft.com/office/powerpoint/2010/main" val="3778953676"/>
       </p:ext>
     </p:extLst>
   </p:cSld>
@@ -4615,7 +5121,7 @@
           <p:cNvPr id="2" name="Title 1">
             <a:extLst>
               <a:ext uri="{FF2B5EF4-FFF2-40B4-BE49-F238E27FC236}">
-                <a16:creationId xmlns:a16="http://schemas.microsoft.com/office/drawing/2014/main" id="{085E08A4-B0B7-0016-F47E-D21F9BC3CAAC}"/>
+                <a16:creationId xmlns:a16="http://schemas.microsoft.com/office/drawing/2014/main" id="{E91E6733-5FD5-3F4E-AD04-D4DFBFAD5B35}"/>
               </a:ext>
             </a:extLst>
           </p:cNvPr>
@@ -4633,7 +5139,7 @@
           <a:p>
             <a:r>
               <a:rPr lang="en-US" dirty="0"/>
-              <a:t>Local blockage of a subassembly</a:t>
+              <a:t>Summary</a:t>
             </a:r>
           </a:p>
         </p:txBody>
@@ -4643,7 +5149,7 @@
           <p:cNvPr id="3" name="Content Placeholder 2">
             <a:extLst>
               <a:ext uri="{FF2B5EF4-FFF2-40B4-BE49-F238E27FC236}">
-                <a16:creationId xmlns:a16="http://schemas.microsoft.com/office/drawing/2014/main" id="{E85947DC-B6F1-43EB-0104-D3C0D6515249}"/>
+                <a16:creationId xmlns:a16="http://schemas.microsoft.com/office/drawing/2014/main" id="{FBCBD647-185F-ED40-B4B3-5DE021720570}"/>
               </a:ext>
             </a:extLst>
           </p:cNvPr>
@@ -4661,41 +5167,38 @@
           <a:p>
             <a:r>
               <a:rPr lang="en-US" sz="2000" dirty="0"/>
-              <a:t>Local blockage formation in a fuel assembly due to ingression of some external material into the bundle may lead to pin failure with subassembly degradation and melting</a:t>
-            </a:r>
-          </a:p>
-          <a:p>
-            <a:r>
-              <a:rPr lang="en-US" sz="2000" dirty="0"/>
-              <a:t>The hypothetical total instantaneous inlet blockage (TIB) of a subassembly at nominal power has been suggested as a potential initiator for a core melt accident</a:t>
-            </a:r>
-          </a:p>
-          <a:p>
-            <a:r>
-              <a:rPr lang="en-US" sz="2000" dirty="0"/>
-              <a:t>Owing to the rapid and complete loss of flow in the faulted subassembly, the usual detection systems are not operating, so core power can not be shut down in time</a:t>
-            </a:r>
-          </a:p>
-          <a:p>
-            <a:r>
-              <a:rPr lang="en-US" sz="2000" dirty="0"/>
-              <a:t>The accident is characterized by overheating and melting of the fuel pins, degradation of the subassembly, wall failure, and possible propagation of molten materials into neighboring subassemblies</a:t>
-            </a:r>
-          </a:p>
-          <a:p>
-            <a:r>
-              <a:rPr lang="en-US" sz="2000" dirty="0"/>
-              <a:t>The main safety issue is the risk of propagation of the accident beyond the neighboring subassemblies that might lead to critical events and generalized core melting</a:t>
-            </a:r>
-          </a:p>
-          <a:p>
-            <a:r>
-              <a:rPr lang="en-US" sz="2000" dirty="0"/>
-              <a:t>Such an accident caused the Fermi-1 core meltdown in 1966</a:t>
-            </a:r>
-          </a:p>
-          <a:p>
-            <a:endParaRPr lang="en-US" sz="2000" dirty="0"/>
+              <a:t>Oxide fuel for fast reactors has proved to be a mature, quite reliable, and very robust fuel concept</a:t>
+            </a:r>
+          </a:p>
+          <a:p>
+            <a:r>
+              <a:rPr lang="en-US" sz="2000" dirty="0"/>
+              <a:t>SFRs with MOX operate at much higher power and temperature than LWRs</a:t>
+            </a:r>
+          </a:p>
+          <a:p>
+            <a:r>
+              <a:rPr lang="en-US" sz="2000" dirty="0"/>
+              <a:t>Despite the low thermal conductivity, fuel loadings to the cladding remain low, and oxide fuel pins have demonstrated an ability to reach extremely high burnup (&gt;15 at%)</a:t>
+            </a:r>
+          </a:p>
+          <a:p>
+            <a:r>
+              <a:rPr lang="en-US" sz="2000" dirty="0"/>
+              <a:t>O/M ratio is one of the most significant factors in determining the nature of actinide redistribution, fission product precipitate chemistries, and FCCI formation</a:t>
+            </a:r>
+          </a:p>
+          <a:p>
+            <a:r>
+              <a:rPr lang="en-US" sz="2000" dirty="0"/>
+              <a:t>Unique features include restructuring, central pore formation, constituent redistribution, and JOG formation</a:t>
+            </a:r>
+          </a:p>
+          <a:p>
+            <a:r>
+              <a:rPr lang="en-US" sz="2000" dirty="0"/>
+              <a:t>Fuel melting is a more critical concern than for UO2 in LWRs</a:t>
+            </a:r>
           </a:p>
           <a:p>
             <a:endParaRPr lang="en-US" sz="2000" dirty="0"/>
@@ -4710,7 +5213,7 @@
           <p:cNvPr id="4" name="Slide Number Placeholder 3">
             <a:extLst>
               <a:ext uri="{FF2B5EF4-FFF2-40B4-BE49-F238E27FC236}">
-                <a16:creationId xmlns:a16="http://schemas.microsoft.com/office/drawing/2014/main" id="{81007B0E-6334-1487-B178-E6A040E4A12E}"/>
+                <a16:creationId xmlns:a16="http://schemas.microsoft.com/office/drawing/2014/main" id="{83CA775A-65BE-DB4F-80DA-8CC498AA243A}"/>
               </a:ext>
             </a:extLst>
           </p:cNvPr>
@@ -4743,7 +5246,7 @@
     </p:spTree>
     <p:extLst>
       <p:ext uri="{BB962C8B-B14F-4D97-AF65-F5344CB8AC3E}">
-        <p14:creationId xmlns:p14="http://schemas.microsoft.com/office/powerpoint/2010/main" val="891162392"/>
+        <p14:creationId xmlns:p14="http://schemas.microsoft.com/office/powerpoint/2010/main" val="4004939698"/>
       </p:ext>
     </p:extLst>
   </p:cSld>
@@ -4775,7 +5278,7 @@
           <p:cNvPr id="2" name="Title 1">
             <a:extLst>
               <a:ext uri="{FF2B5EF4-FFF2-40B4-BE49-F238E27FC236}">
-                <a16:creationId xmlns:a16="http://schemas.microsoft.com/office/drawing/2014/main" id="{7A497B8A-4E6F-61D0-261F-EF0AFA457849}"/>
+                <a16:creationId xmlns:a16="http://schemas.microsoft.com/office/drawing/2014/main" id="{6E9591DB-2E4B-6AF8-FF23-B9CF67F0B134}"/>
               </a:ext>
             </a:extLst>
           </p:cNvPr>
@@ -4793,7 +5296,7 @@
           <a:p>
             <a:r>
               <a:rPr lang="en-US" dirty="0"/>
-              <a:t>Unprotected loss of flow accident (ULOF)</a:t>
+              <a:t>Accidents/Transients in MOX SFRs</a:t>
             </a:r>
           </a:p>
         </p:txBody>
@@ -4803,7 +5306,7 @@
           <p:cNvPr id="3" name="Content Placeholder 2">
             <a:extLst>
               <a:ext uri="{FF2B5EF4-FFF2-40B4-BE49-F238E27FC236}">
-                <a16:creationId xmlns:a16="http://schemas.microsoft.com/office/drawing/2014/main" id="{59B42870-DF72-3249-AB3C-0C7EFA37B212}"/>
+                <a16:creationId xmlns:a16="http://schemas.microsoft.com/office/drawing/2014/main" id="{08F1445C-EEAA-B0B4-3C59-44C62E3954E4}"/>
               </a:ext>
             </a:extLst>
           </p:cNvPr>
@@ -4820,54 +5323,37 @@
           <a:lstStyle/>
           <a:p>
             <a:r>
-              <a:rPr lang="en-US" sz="2000" dirty="0"/>
-              <a:t>The ULOF accident is the result of loss of primary pump flow due to an initiating event such as electrical break-down without reactor scram</a:t>
-            </a:r>
-          </a:p>
-          <a:p>
-            <a:r>
-              <a:rPr lang="en-US" sz="2000" dirty="0"/>
-              <a:t>The first phase leads to sodium flow reduction and to associated power reduction linked to reactivity feedback</a:t>
-            </a:r>
-          </a:p>
-          <a:p>
-            <a:r>
-              <a:rPr lang="en-US" sz="2000" dirty="0"/>
-              <a:t>The power to flow ratio increases so that the temperature causes sodium boiling</a:t>
-            </a:r>
-          </a:p>
-          <a:p>
-            <a:r>
-              <a:rPr lang="en-US" sz="2000" dirty="0"/>
-              <a:t>Due to the positive ‘sodium void effect’ in the central core regions, the ULOF leads to sodium boiling and channel voiding and may result in a core disruptive accident (CDA)</a:t>
-            </a:r>
-          </a:p>
-          <a:p>
-            <a:r>
-              <a:rPr lang="en-US" sz="2000" dirty="0"/>
-              <a:t>This can lead to generalized core degradation: fuel melting, clad failure and/or melting, fuel ejection into coolant, fuel dispersal and relocation into the channels, and possible mechanical energy release</a:t>
-            </a:r>
-          </a:p>
-          <a:p>
-            <a:r>
-              <a:rPr lang="en-US" sz="2000" dirty="0"/>
-              <a:t>Although this accident is initiated by a loss of coolant flow, it may rapidly evolve toward a fast reactivity insertion accident</a:t>
-            </a:r>
-          </a:p>
-          <a:p>
-            <a:endParaRPr lang="en-US" sz="2000" dirty="0"/>
-          </a:p>
-          <a:p>
-            <a:endParaRPr lang="en-US" sz="2000" dirty="0"/>
-          </a:p>
-          <a:p>
-            <a:endParaRPr lang="en-US" sz="2000" dirty="0"/>
-          </a:p>
-          <a:p>
-            <a:endParaRPr lang="en-US" sz="2000" dirty="0"/>
-          </a:p>
-          <a:p>
-            <a:endParaRPr lang="en-US" sz="2000" dirty="0"/>
+              <a:rPr lang="en-US" dirty="0"/>
+              <a:t>For sodium fast reactors three main types of transient and accident scenarios are considered as references for the study of fuel transient and accident behavior:</a:t>
+            </a:r>
+          </a:p>
+          <a:p>
+            <a:pPr lvl="1"/>
+            <a:r>
+              <a:rPr lang="en-US" dirty="0"/>
+              <a:t>the slow power transient representative of one control-rod withdrawal</a:t>
+            </a:r>
+          </a:p>
+          <a:p>
+            <a:pPr lvl="1"/>
+            <a:r>
+              <a:rPr lang="en-US" dirty="0"/>
+              <a:t>the loss of cooling due to blockage of a subassembly</a:t>
+            </a:r>
+          </a:p>
+          <a:p>
+            <a:pPr lvl="1"/>
+            <a:r>
+              <a:rPr lang="en-US" dirty="0"/>
+              <a:t>the unprotected loss of flow (ULOF) accident that might lead to a core disruptive accident</a:t>
+            </a:r>
+          </a:p>
+          <a:p>
+            <a:pPr lvl="1"/>
+            <a:endParaRPr lang="en-US" dirty="0"/>
+          </a:p>
+          <a:p>
+            <a:endParaRPr lang="en-US" dirty="0"/>
           </a:p>
         </p:txBody>
       </p:sp>
@@ -4876,7 +5362,7 @@
           <p:cNvPr id="4" name="Slide Number Placeholder 3">
             <a:extLst>
               <a:ext uri="{FF2B5EF4-FFF2-40B4-BE49-F238E27FC236}">
-                <a16:creationId xmlns:a16="http://schemas.microsoft.com/office/drawing/2014/main" id="{BF558D7C-DAB6-0433-6A33-D33594684E3E}"/>
+                <a16:creationId xmlns:a16="http://schemas.microsoft.com/office/drawing/2014/main" id="{39CE3405-7C0B-F41F-1F55-5F2AFE449F8E}"/>
               </a:ext>
             </a:extLst>
           </p:cNvPr>
@@ -4909,7 +5395,7 @@
     </p:spTree>
     <p:extLst>
       <p:ext uri="{BB962C8B-B14F-4D97-AF65-F5344CB8AC3E}">
-        <p14:creationId xmlns:p14="http://schemas.microsoft.com/office/powerpoint/2010/main" val="2697475136"/>
+        <p14:creationId xmlns:p14="http://schemas.microsoft.com/office/powerpoint/2010/main" val="852048271"/>
       </p:ext>
     </p:extLst>
   </p:cSld>
@@ -4941,7 +5427,7 @@
           <p:cNvPr id="2" name="Title 1">
             <a:extLst>
               <a:ext uri="{FF2B5EF4-FFF2-40B4-BE49-F238E27FC236}">
-                <a16:creationId xmlns:a16="http://schemas.microsoft.com/office/drawing/2014/main" id="{22AF2303-ED75-9638-B8BB-47F00634ED28}"/>
+                <a16:creationId xmlns:a16="http://schemas.microsoft.com/office/drawing/2014/main" id="{81AEA03C-268C-9934-0DFE-4D72965F46D9}"/>
               </a:ext>
             </a:extLst>
           </p:cNvPr>
@@ -4959,7 +5445,7 @@
           <a:p>
             <a:r>
               <a:rPr lang="en-US" dirty="0"/>
-              <a:t>Fuel Behavior Under Slow Power Transients</a:t>
+              <a:t>Control Rod Withdrawal Accident (CRWA)</a:t>
             </a:r>
           </a:p>
         </p:txBody>
@@ -4969,7 +5455,7 @@
           <p:cNvPr id="3" name="Content Placeholder 2">
             <a:extLst>
               <a:ext uri="{FF2B5EF4-FFF2-40B4-BE49-F238E27FC236}">
-                <a16:creationId xmlns:a16="http://schemas.microsoft.com/office/drawing/2014/main" id="{46C0E8D4-174A-95F9-A09F-4DC56B52D429}"/>
+                <a16:creationId xmlns:a16="http://schemas.microsoft.com/office/drawing/2014/main" id="{1F686EE3-A36A-0C68-65B3-3D442FE1EC5F}"/>
               </a:ext>
             </a:extLst>
           </p:cNvPr>
@@ -4987,37 +5473,19 @@
           <a:p>
             <a:r>
               <a:rPr lang="en-US" sz="2000" dirty="0"/>
-              <a:t>Despite high fission gas release rate in MOX fuel due to high operation temperature (60-80% release), power increases resulting in higher temperatures also activate fission gas-related phenomena that influence thermal and mechanical pin behavior</a:t>
-            </a:r>
-          </a:p>
-          <a:p>
-            <a:r>
-              <a:rPr lang="en-US" sz="2000" dirty="0"/>
-              <a:t>Intragranular gas migration toward grain boundary related to the thermal gradient</a:t>
-            </a:r>
-          </a:p>
-          <a:p>
-            <a:r>
-              <a:rPr lang="en-US" sz="2000" dirty="0"/>
-              <a:t>Gas bubble growth due to coalescence via vacancy diffusion</a:t>
-            </a:r>
-          </a:p>
-          <a:p>
-            <a:r>
-              <a:rPr lang="en-US" sz="2000" dirty="0"/>
-              <a:t>Fission gas-induced fuel swelling driven by an increase in the bubble pressure</a:t>
-            </a:r>
-          </a:p>
-          <a:p>
-            <a:r>
-              <a:rPr lang="en-US" sz="2000" dirty="0"/>
-              <a:t>Saturation and interconnection of grain boundary bubbles leading to additional gas release</a:t>
-            </a:r>
-          </a:p>
-          <a:p>
-            <a:r>
-              <a:rPr lang="en-US" sz="2000" dirty="0"/>
-              <a:t>Under slow power transients, fuel heat generation and heat removal by the sodium coolant are almost in thermal equilibrium, and these ‘quasi’ steady-state conditions allow the evaluation of the power level at which fuel melting occurs, providing operating limits</a:t>
+              <a:t>Slow power transients due to control-rod withdrawal are the most common transients occurring during reactor operation as they are used for regulation of the core power</a:t>
+            </a:r>
+          </a:p>
+          <a:p>
+            <a:r>
+              <a:rPr lang="en-US" sz="2000" dirty="0"/>
+              <a:t>In case of an inadvertent control-rod withdrawal due to operator action together with a failure of various protection systems, this transient might lead to severe consequences</a:t>
+            </a:r>
+          </a:p>
+          <a:p>
+            <a:r>
+              <a:rPr lang="en-US" sz="2000" dirty="0"/>
+              <a:t>During such a transient, nominal power can increase by 1-3% per second, and may lead to partial fuel melting inside the pins of the subassemblies surrounding the control rod</a:t>
             </a:r>
           </a:p>
           <a:p>
@@ -5039,7 +5507,7 @@
           <p:cNvPr id="4" name="Slide Number Placeholder 3">
             <a:extLst>
               <a:ext uri="{FF2B5EF4-FFF2-40B4-BE49-F238E27FC236}">
-                <a16:creationId xmlns:a16="http://schemas.microsoft.com/office/drawing/2014/main" id="{FA2E0889-DC8D-292D-815B-A5B6F87756F1}"/>
+                <a16:creationId xmlns:a16="http://schemas.microsoft.com/office/drawing/2014/main" id="{3D652275-E112-394A-DEC9-C5AB7905C93E}"/>
               </a:ext>
             </a:extLst>
           </p:cNvPr>
@@ -5072,7 +5540,7 @@
     </p:spTree>
     <p:extLst>
       <p:ext uri="{BB962C8B-B14F-4D97-AF65-F5344CB8AC3E}">
-        <p14:creationId xmlns:p14="http://schemas.microsoft.com/office/powerpoint/2010/main" val="1213699145"/>
+        <p14:creationId xmlns:p14="http://schemas.microsoft.com/office/powerpoint/2010/main" val="3030334558"/>
       </p:ext>
     </p:extLst>
   </p:cSld>
@@ -5104,7 +5572,7 @@
           <p:cNvPr id="2" name="Title 1">
             <a:extLst>
               <a:ext uri="{FF2B5EF4-FFF2-40B4-BE49-F238E27FC236}">
-                <a16:creationId xmlns:a16="http://schemas.microsoft.com/office/drawing/2014/main" id="{EB3A9720-F78D-4E3B-EEA0-BB0C2F336AAD}"/>
+                <a16:creationId xmlns:a16="http://schemas.microsoft.com/office/drawing/2014/main" id="{085E08A4-B0B7-0016-F47E-D21F9BC3CAAC}"/>
               </a:ext>
             </a:extLst>
           </p:cNvPr>
@@ -5122,7 +5590,7 @@
           <a:p>
             <a:r>
               <a:rPr lang="en-US" dirty="0"/>
-              <a:t>Fuel Melting</a:t>
+              <a:t>Local blockage of a subassembly</a:t>
             </a:r>
           </a:p>
         </p:txBody>
@@ -5132,7 +5600,7 @@
           <p:cNvPr id="3" name="Content Placeholder 2">
             <a:extLst>
               <a:ext uri="{FF2B5EF4-FFF2-40B4-BE49-F238E27FC236}">
-                <a16:creationId xmlns:a16="http://schemas.microsoft.com/office/drawing/2014/main" id="{DA254697-C9C4-7A4D-E635-1C855356D9F3}"/>
+                <a16:creationId xmlns:a16="http://schemas.microsoft.com/office/drawing/2014/main" id="{E85947DC-B6F1-43EB-0104-D3C0D6515249}"/>
               </a:ext>
             </a:extLst>
           </p:cNvPr>
@@ -5143,49 +5611,44 @@
             <p:ph idx="1"/>
           </p:nvPr>
         </p:nvSpPr>
-        <p:spPr>
-          <a:xfrm>
-            <a:off x="609600" y="1968501"/>
-            <a:ext cx="10972800" cy="4157664"/>
-          </a:xfrm>
-        </p:spPr>
+        <p:spPr/>
         <p:txBody>
           <a:bodyPr/>
           <a:lstStyle/>
           <a:p>
             <a:r>
               <a:rPr lang="en-US" sz="2000" dirty="0"/>
-              <a:t>SFRs with MOX are sensitive to any fuel compaction effect that might result from fuel motion (for instance, due to melting) with the potential risk of prompt-critical events and mechanical energy release to the vessel structure</a:t>
-            </a:r>
-          </a:p>
-          <a:p>
-            <a:r>
-              <a:rPr lang="en-US" sz="2000" dirty="0"/>
-              <a:t>Fuel-melting occurrence depends on pin thermal behavior that is governed by thermal conductivity, heat exchange between fuel and clad through the pellet–clad gap, and melting temperature</a:t>
-            </a:r>
-          </a:p>
-          <a:p>
-            <a:r>
-              <a:rPr lang="en-US" sz="2000" dirty="0"/>
-              <a:t>Melting temperature and thermal conductivity depend on stoichiometry and burnup</a:t>
-            </a:r>
-          </a:p>
-          <a:p>
-            <a:r>
-              <a:rPr lang="en-US" sz="2000" dirty="0"/>
-              <a:t>Heat exchange in the fuel system is governed by evolution of gap thickness and composition</a:t>
-            </a:r>
-          </a:p>
-          <a:p>
-            <a:r>
-              <a:rPr lang="en-US" sz="2000" dirty="0"/>
-              <a:t>High T plastic fuel creep may lead to central hole reduction and to increase of the macroscopic fuel porosity with subsequent reduction of the thermal conductivity and thus higher fuel temperature in the center that results in a lower power at melting onset</a:t>
-            </a:r>
-          </a:p>
-          <a:p>
-            <a:r>
-              <a:rPr lang="en-US" sz="2000" dirty="0"/>
-              <a:t>High peaking factors (~1.3, compared to ~1.1 in LWRs), can increase the local temperatures in high power regions and increase probability of fuel melting</a:t>
+              <a:t>Local blockage formation in a fuel assembly due to ingression of some external material into the bundle may lead to pin failure with subassembly degradation and melting</a:t>
+            </a:r>
+          </a:p>
+          <a:p>
+            <a:r>
+              <a:rPr lang="en-US" sz="2000" dirty="0"/>
+              <a:t>The hypothetical total instantaneous inlet blockage (TIB) of a subassembly at nominal power has been suggested as a potential initiator for a core melt accident</a:t>
+            </a:r>
+          </a:p>
+          <a:p>
+            <a:r>
+              <a:rPr lang="en-US" sz="2000" dirty="0"/>
+              <a:t>Owing to the rapid and complete loss of flow in the faulted subassembly, the usual detection systems are not operating, so core power can not be shut down in time</a:t>
+            </a:r>
+          </a:p>
+          <a:p>
+            <a:r>
+              <a:rPr lang="en-US" sz="2000" dirty="0"/>
+              <a:t>The accident is characterized by overheating and melting of the fuel pins, degradation of the subassembly, wall failure, and possible propagation of molten materials into neighboring subassemblies</a:t>
+            </a:r>
+          </a:p>
+          <a:p>
+            <a:r>
+              <a:rPr lang="en-US" sz="2000" dirty="0"/>
+              <a:t>The main safety issue is the risk of propagation of the accident beyond the neighboring subassemblies that might lead to critical events and generalized core melting</a:t>
+            </a:r>
+          </a:p>
+          <a:p>
+            <a:r>
+              <a:rPr lang="en-US" sz="2000" dirty="0"/>
+              <a:t>Such an accident caused the Fermi-1 core meltdown in 1966</a:t>
             </a:r>
           </a:p>
           <a:p>
@@ -5204,7 +5667,7 @@
           <p:cNvPr id="4" name="Slide Number Placeholder 3">
             <a:extLst>
               <a:ext uri="{FF2B5EF4-FFF2-40B4-BE49-F238E27FC236}">
-                <a16:creationId xmlns:a16="http://schemas.microsoft.com/office/drawing/2014/main" id="{B8BA4DDF-D969-B07B-E689-810E07F7F103}"/>
+                <a16:creationId xmlns:a16="http://schemas.microsoft.com/office/drawing/2014/main" id="{81007B0E-6334-1487-B178-E6A040E4A12E}"/>
               </a:ext>
             </a:extLst>
           </p:cNvPr>
@@ -5237,7 +5700,7 @@
     </p:spTree>
     <p:extLst>
       <p:ext uri="{BB962C8B-B14F-4D97-AF65-F5344CB8AC3E}">
-        <p14:creationId xmlns:p14="http://schemas.microsoft.com/office/powerpoint/2010/main" val="3778953676"/>
+        <p14:creationId xmlns:p14="http://schemas.microsoft.com/office/powerpoint/2010/main" val="3636951936"/>
       </p:ext>
     </p:extLst>
   </p:cSld>
@@ -5269,7 +5732,7 @@
           <p:cNvPr id="2" name="Title 1">
             <a:extLst>
               <a:ext uri="{FF2B5EF4-FFF2-40B4-BE49-F238E27FC236}">
-                <a16:creationId xmlns:a16="http://schemas.microsoft.com/office/drawing/2014/main" id="{E91E6733-5FD5-3F4E-AD04-D4DFBFAD5B35}"/>
+                <a16:creationId xmlns:a16="http://schemas.microsoft.com/office/drawing/2014/main" id="{7A497B8A-4E6F-61D0-261F-EF0AFA457849}"/>
               </a:ext>
             </a:extLst>
           </p:cNvPr>
@@ -5287,7 +5750,7 @@
           <a:p>
             <a:r>
               <a:rPr lang="en-US" dirty="0"/>
-              <a:t>Summary</a:t>
+              <a:t>Unprotected loss of flow accident (ULOF)</a:t>
             </a:r>
           </a:p>
         </p:txBody>
@@ -5297,7 +5760,7 @@
           <p:cNvPr id="3" name="Content Placeholder 2">
             <a:extLst>
               <a:ext uri="{FF2B5EF4-FFF2-40B4-BE49-F238E27FC236}">
-                <a16:creationId xmlns:a16="http://schemas.microsoft.com/office/drawing/2014/main" id="{FBCBD647-185F-ED40-B4B3-5DE021720570}"/>
+                <a16:creationId xmlns:a16="http://schemas.microsoft.com/office/drawing/2014/main" id="{59B42870-DF72-3249-AB3C-0C7EFA37B212}"/>
               </a:ext>
             </a:extLst>
           </p:cNvPr>
@@ -5315,51 +5778,47 @@
           <a:p>
             <a:r>
               <a:rPr lang="en-US" sz="2000" dirty="0"/>
-              <a:t>Oxide fuel for fast reactors has proved to be a mature, quite reliable, and very robust fuel concept</a:t>
-            </a:r>
-          </a:p>
-          <a:p>
-            <a:r>
-              <a:rPr lang="en-US" sz="2000" dirty="0"/>
-              <a:t>SFRs with MOX operate at much higher power and temperature than LWRs</a:t>
-            </a:r>
-          </a:p>
-          <a:p>
-            <a:r>
-              <a:rPr lang="en-US" sz="2000" dirty="0"/>
-              <a:t>Despite the low thermal conductivity, fuel loadings to the cladding remain low, and oxide fuel pins have demonstrated an ability to reach extremely high burnup (&gt;15 at%)</a:t>
-            </a:r>
-          </a:p>
-          <a:p>
-            <a:r>
-              <a:rPr lang="en-US" sz="2000" dirty="0"/>
-              <a:t>O/M ratio is one of the most significant factors in determining the nature of actinide redistribution, fission product precipitate chemistries, and FCCI formation</a:t>
-            </a:r>
-          </a:p>
-          <a:p>
-            <a:r>
-              <a:rPr lang="en-US" sz="2000" dirty="0"/>
-              <a:t>Unique features include restructuring, central pore formation, and JOG formation</a:t>
-            </a:r>
-          </a:p>
-          <a:p>
-            <a:r>
-              <a:rPr lang="en-US" sz="2000" dirty="0"/>
-              <a:t>Three main types of transient of interest in MOX SFRs</a:t>
-            </a:r>
-          </a:p>
-          <a:p>
-            <a:pPr lvl="1"/>
-            <a:r>
-              <a:rPr lang="en-US" sz="2000" dirty="0"/>
-              <a:t>slow power transient (CRWA); blockage of a subassembly; unprotected loss of flow accident</a:t>
-            </a:r>
-          </a:p>
-          <a:p>
-            <a:r>
-              <a:rPr lang="en-US" sz="2000" dirty="0"/>
-              <a:t>Fuel melting is one of the most critical concerns</a:t>
-            </a:r>
+              <a:t>The ULOF accident is the result of loss of primary pump flow due to an initiating event such as electrical break-down without reactor scram</a:t>
+            </a:r>
+          </a:p>
+          <a:p>
+            <a:r>
+              <a:rPr lang="en-US" sz="2000" dirty="0"/>
+              <a:t>The first phase leads to sodium flow reduction and to associated power reduction linked to reactivity feedback</a:t>
+            </a:r>
+          </a:p>
+          <a:p>
+            <a:r>
+              <a:rPr lang="en-US" sz="2000" dirty="0"/>
+              <a:t>The power to flow ratio increases so that the temperature causes sodium boiling</a:t>
+            </a:r>
+          </a:p>
+          <a:p>
+            <a:r>
+              <a:rPr lang="en-US" sz="2000" dirty="0"/>
+              <a:t>Due to the positive ‘sodium void effect’ in the central core regions, the ULOF leads to sodium boiling and channel voiding and may result in a core disruptive accident (CDA)</a:t>
+            </a:r>
+          </a:p>
+          <a:p>
+            <a:r>
+              <a:rPr lang="en-US" sz="2000" dirty="0"/>
+              <a:t>This can lead to generalized core degradation: fuel melting, clad failure and/or melting, fuel ejection into coolant, fuel dispersal and relocation into the channels, and possible mechanical energy release</a:t>
+            </a:r>
+          </a:p>
+          <a:p>
+            <a:r>
+              <a:rPr lang="en-US" sz="2000" dirty="0"/>
+              <a:t>Although this accident is initiated by a loss of coolant flow, it may rapidly evolve toward a fast reactivity insertion accident</a:t>
+            </a:r>
+          </a:p>
+          <a:p>
+            <a:endParaRPr lang="en-US" sz="2000" dirty="0"/>
+          </a:p>
+          <a:p>
+            <a:endParaRPr lang="en-US" sz="2000" dirty="0"/>
+          </a:p>
+          <a:p>
+            <a:endParaRPr lang="en-US" sz="2000" dirty="0"/>
           </a:p>
           <a:p>
             <a:endParaRPr lang="en-US" sz="2000" dirty="0"/>
@@ -5374,7 +5833,7 @@
           <p:cNvPr id="4" name="Slide Number Placeholder 3">
             <a:extLst>
               <a:ext uri="{FF2B5EF4-FFF2-40B4-BE49-F238E27FC236}">
-                <a16:creationId xmlns:a16="http://schemas.microsoft.com/office/drawing/2014/main" id="{83CA775A-65BE-DB4F-80DA-8CC498AA243A}"/>
+                <a16:creationId xmlns:a16="http://schemas.microsoft.com/office/drawing/2014/main" id="{BF558D7C-DAB6-0433-6A33-D33594684E3E}"/>
               </a:ext>
             </a:extLst>
           </p:cNvPr>
@@ -5407,7 +5866,7 @@
     </p:spTree>
     <p:extLst>
       <p:ext uri="{BB962C8B-B14F-4D97-AF65-F5344CB8AC3E}">
-        <p14:creationId xmlns:p14="http://schemas.microsoft.com/office/powerpoint/2010/main" val="4004939698"/>
+        <p14:creationId xmlns:p14="http://schemas.microsoft.com/office/powerpoint/2010/main" val="3063454958"/>
       </p:ext>
     </p:extLst>
   </p:cSld>
@@ -5485,32 +5944,84 @@
           <a:p>
             <a:r>
               <a:rPr lang="en-US" sz="2000" dirty="0"/>
-              <a:t>Steam oxidation can lead to breakaway oxidation, leading to thick, cracked oxides and high H generation</a:t>
-            </a:r>
-          </a:p>
-          <a:p>
-            <a:r>
-              <a:rPr lang="en-US" sz="2000" dirty="0"/>
-              <a:t>Advanced cladding materials and coatings are being explored to improve accident tolerance</a:t>
-            </a:r>
-          </a:p>
-          <a:p>
-            <a:r>
-              <a:rPr lang="en-US" sz="2000" dirty="0"/>
-              <a:t>There are a variety of limiting phenomena in LWR fuel systems that provide the boundaries of operation and lifetime</a:t>
-            </a:r>
-          </a:p>
-          <a:p>
-            <a:r>
-              <a:rPr lang="en-US" sz="2000" dirty="0"/>
-              <a:t>These limits include phenomena in the fuel, gap, cladding, corrosion, and assembly levels</a:t>
-            </a:r>
-          </a:p>
-          <a:p>
-            <a:r>
-              <a:rPr lang="en-US" sz="2000" dirty="0"/>
-              <a:t>Primary system water chemistry affects fuel performance through the deposition of corrosion products on fuel pin surfaces, primary control through addition of hydrogen</a:t>
-            </a:r>
+              <a:t>Primary system water chemistry affects fuel performance through the deposition of corrosion products on fuel pin surfaces </a:t>
+            </a:r>
+          </a:p>
+          <a:p>
+            <a:r>
+              <a:rPr lang="en-US" sz="2000" dirty="0"/>
+              <a:t>Control techniques:</a:t>
+            </a:r>
+          </a:p>
+          <a:p>
+            <a:pPr lvl="1"/>
+            <a:r>
+              <a:rPr lang="en-US" sz="2000" dirty="0"/>
+              <a:t>H water chemistry, Zn injection, pH control (related: boron/</a:t>
+            </a:r>
+            <a:r>
+              <a:rPr lang="en-US" sz="2000" dirty="0" err="1"/>
+              <a:t>LiOH</a:t>
+            </a:r>
+            <a:r>
+              <a:rPr lang="en-US" sz="2000" dirty="0"/>
+              <a:t>), noble metal injection</a:t>
+            </a:r>
+          </a:p>
+          <a:p>
+            <a:r>
+              <a:rPr lang="en-US" sz="2000" dirty="0"/>
+              <a:t>CRUD performance/safety impacts</a:t>
+            </a:r>
+          </a:p>
+          <a:p>
+            <a:pPr lvl="1"/>
+            <a:r>
+              <a:rPr lang="en-US" sz="2000" dirty="0"/>
+              <a:t>degrades heat transport, power shifts, radiation fields out of core</a:t>
+            </a:r>
+          </a:p>
+          <a:p>
+            <a:r>
+              <a:rPr lang="en-US" sz="2000" dirty="0"/>
+              <a:t>MOX intro</a:t>
+            </a:r>
+          </a:p>
+          <a:p>
+            <a:pPr lvl="1"/>
+            <a:r>
+              <a:rPr lang="en-US" sz="2000" dirty="0"/>
+              <a:t>(U/Pu)O2, generally similar behavior to UO2, but with modified properties</a:t>
+            </a:r>
+          </a:p>
+          <a:p>
+            <a:pPr lvl="1"/>
+            <a:r>
+              <a:rPr lang="en-US" sz="2000" dirty="0"/>
+              <a:t>Deployed in LWRs as ‘partial MOX’ cores, employed in fast reactors as a breeder/burner</a:t>
+            </a:r>
+          </a:p>
+          <a:p>
+            <a:pPr lvl="1"/>
+            <a:r>
+              <a:rPr lang="en-US" sz="2000" dirty="0"/>
+              <a:t>SFR MOX cores have high power densities, higher fuel temperatures</a:t>
+            </a:r>
+          </a:p>
+          <a:p>
+            <a:pPr lvl="1"/>
+            <a:r>
+              <a:rPr lang="en-US" sz="2000" dirty="0"/>
+              <a:t>Began on restructuring</a:t>
+            </a:r>
+          </a:p>
+          <a:p>
+            <a:pPr lvl="1"/>
+            <a:endParaRPr lang="en-US" sz="2000" dirty="0"/>
+          </a:p>
+          <a:p>
+            <a:pPr lvl="1"/>
+            <a:endParaRPr lang="en-US" sz="2000" dirty="0"/>
           </a:p>
         </p:txBody>
       </p:sp>
@@ -5553,6 +6064,689 @@
     <p:extLst>
       <p:ext uri="{BB962C8B-B14F-4D97-AF65-F5344CB8AC3E}">
         <p14:creationId xmlns:p14="http://schemas.microsoft.com/office/powerpoint/2010/main" val="1140436676"/>
+      </p:ext>
+    </p:extLst>
+  </p:cSld>
+  <p:clrMapOvr>
+    <a:masterClrMapping/>
+  </p:clrMapOvr>
+  <p:timing>
+    <p:tnLst>
+      <p:par>
+        <p:cTn id="1" dur="indefinite" restart="never" nodeType="tmRoot">
+          <p:childTnLst>
+            <p:seq concurrent="1" nextAc="seek">
+              <p:cTn id="2" dur="indefinite" nodeType="mainSeq">
+                <p:childTnLst>
+                  <p:par>
+                    <p:cTn id="3" fill="hold">
+                      <p:stCondLst>
+                        <p:cond delay="indefinite"/>
+                      </p:stCondLst>
+                      <p:childTnLst>
+                        <p:par>
+                          <p:cTn id="4" fill="hold">
+                            <p:stCondLst>
+                              <p:cond delay="0"/>
+                            </p:stCondLst>
+                            <p:childTnLst>
+                              <p:par>
+                                <p:cTn id="5" presetID="1" presetClass="entr" presetSubtype="0" fill="hold" nodeType="clickEffect">
+                                  <p:stCondLst>
+                                    <p:cond delay="0"/>
+                                  </p:stCondLst>
+                                  <p:childTnLst>
+                                    <p:set>
+                                      <p:cBhvr>
+                                        <p:cTn id="6" dur="1" fill="hold">
+                                          <p:stCondLst>
+                                            <p:cond delay="0"/>
+                                          </p:stCondLst>
+                                        </p:cTn>
+                                        <p:tgtEl>
+                                          <p:spTgt spid="3">
+                                            <p:txEl>
+                                              <p:pRg st="0" end="0"/>
+                                            </p:txEl>
+                                          </p:spTgt>
+                                        </p:tgtEl>
+                                        <p:attrNameLst>
+                                          <p:attrName>style.visibility</p:attrName>
+                                        </p:attrNameLst>
+                                      </p:cBhvr>
+                                      <p:to>
+                                        <p:strVal val="visible"/>
+                                      </p:to>
+                                    </p:set>
+                                  </p:childTnLst>
+                                </p:cTn>
+                              </p:par>
+                            </p:childTnLst>
+                          </p:cTn>
+                        </p:par>
+                      </p:childTnLst>
+                    </p:cTn>
+                  </p:par>
+                  <p:par>
+                    <p:cTn id="7" fill="hold">
+                      <p:stCondLst>
+                        <p:cond delay="indefinite"/>
+                      </p:stCondLst>
+                      <p:childTnLst>
+                        <p:par>
+                          <p:cTn id="8" fill="hold">
+                            <p:stCondLst>
+                              <p:cond delay="0"/>
+                            </p:stCondLst>
+                            <p:childTnLst>
+                              <p:par>
+                                <p:cTn id="9" presetID="1" presetClass="entr" presetSubtype="0" fill="hold" nodeType="clickEffect">
+                                  <p:stCondLst>
+                                    <p:cond delay="0"/>
+                                  </p:stCondLst>
+                                  <p:childTnLst>
+                                    <p:set>
+                                      <p:cBhvr>
+                                        <p:cTn id="10" dur="1" fill="hold">
+                                          <p:stCondLst>
+                                            <p:cond delay="0"/>
+                                          </p:stCondLst>
+                                        </p:cTn>
+                                        <p:tgtEl>
+                                          <p:spTgt spid="3">
+                                            <p:txEl>
+                                              <p:pRg st="1" end="1"/>
+                                            </p:txEl>
+                                          </p:spTgt>
+                                        </p:tgtEl>
+                                        <p:attrNameLst>
+                                          <p:attrName>style.visibility</p:attrName>
+                                        </p:attrNameLst>
+                                      </p:cBhvr>
+                                      <p:to>
+                                        <p:strVal val="visible"/>
+                                      </p:to>
+                                    </p:set>
+                                  </p:childTnLst>
+                                </p:cTn>
+                              </p:par>
+                            </p:childTnLst>
+                          </p:cTn>
+                        </p:par>
+                      </p:childTnLst>
+                    </p:cTn>
+                  </p:par>
+                  <p:par>
+                    <p:cTn id="11" fill="hold">
+                      <p:stCondLst>
+                        <p:cond delay="indefinite"/>
+                      </p:stCondLst>
+                      <p:childTnLst>
+                        <p:par>
+                          <p:cTn id="12" fill="hold">
+                            <p:stCondLst>
+                              <p:cond delay="0"/>
+                            </p:stCondLst>
+                            <p:childTnLst>
+                              <p:par>
+                                <p:cTn id="13" presetID="1" presetClass="entr" presetSubtype="0" fill="hold" nodeType="clickEffect">
+                                  <p:stCondLst>
+                                    <p:cond delay="0"/>
+                                  </p:stCondLst>
+                                  <p:childTnLst>
+                                    <p:set>
+                                      <p:cBhvr>
+                                        <p:cTn id="14" dur="1" fill="hold">
+                                          <p:stCondLst>
+                                            <p:cond delay="0"/>
+                                          </p:stCondLst>
+                                        </p:cTn>
+                                        <p:tgtEl>
+                                          <p:spTgt spid="3">
+                                            <p:txEl>
+                                              <p:pRg st="2" end="2"/>
+                                            </p:txEl>
+                                          </p:spTgt>
+                                        </p:tgtEl>
+                                        <p:attrNameLst>
+                                          <p:attrName>style.visibility</p:attrName>
+                                        </p:attrNameLst>
+                                      </p:cBhvr>
+                                      <p:to>
+                                        <p:strVal val="visible"/>
+                                      </p:to>
+                                    </p:set>
+                                  </p:childTnLst>
+                                </p:cTn>
+                              </p:par>
+                            </p:childTnLst>
+                          </p:cTn>
+                        </p:par>
+                      </p:childTnLst>
+                    </p:cTn>
+                  </p:par>
+                  <p:par>
+                    <p:cTn id="15" fill="hold">
+                      <p:stCondLst>
+                        <p:cond delay="indefinite"/>
+                      </p:stCondLst>
+                      <p:childTnLst>
+                        <p:par>
+                          <p:cTn id="16" fill="hold">
+                            <p:stCondLst>
+                              <p:cond delay="0"/>
+                            </p:stCondLst>
+                            <p:childTnLst>
+                              <p:par>
+                                <p:cTn id="17" presetID="1" presetClass="entr" presetSubtype="0" fill="hold" nodeType="clickEffect">
+                                  <p:stCondLst>
+                                    <p:cond delay="0"/>
+                                  </p:stCondLst>
+                                  <p:childTnLst>
+                                    <p:set>
+                                      <p:cBhvr>
+                                        <p:cTn id="18" dur="1" fill="hold">
+                                          <p:stCondLst>
+                                            <p:cond delay="0"/>
+                                          </p:stCondLst>
+                                        </p:cTn>
+                                        <p:tgtEl>
+                                          <p:spTgt spid="3">
+                                            <p:txEl>
+                                              <p:pRg st="3" end="3"/>
+                                            </p:txEl>
+                                          </p:spTgt>
+                                        </p:tgtEl>
+                                        <p:attrNameLst>
+                                          <p:attrName>style.visibility</p:attrName>
+                                        </p:attrNameLst>
+                                      </p:cBhvr>
+                                      <p:to>
+                                        <p:strVal val="visible"/>
+                                      </p:to>
+                                    </p:set>
+                                  </p:childTnLst>
+                                </p:cTn>
+                              </p:par>
+                            </p:childTnLst>
+                          </p:cTn>
+                        </p:par>
+                      </p:childTnLst>
+                    </p:cTn>
+                  </p:par>
+                  <p:par>
+                    <p:cTn id="19" fill="hold">
+                      <p:stCondLst>
+                        <p:cond delay="indefinite"/>
+                      </p:stCondLst>
+                      <p:childTnLst>
+                        <p:par>
+                          <p:cTn id="20" fill="hold">
+                            <p:stCondLst>
+                              <p:cond delay="0"/>
+                            </p:stCondLst>
+                            <p:childTnLst>
+                              <p:par>
+                                <p:cTn id="21" presetID="1" presetClass="entr" presetSubtype="0" fill="hold" nodeType="clickEffect">
+                                  <p:stCondLst>
+                                    <p:cond delay="0"/>
+                                  </p:stCondLst>
+                                  <p:childTnLst>
+                                    <p:set>
+                                      <p:cBhvr>
+                                        <p:cTn id="22" dur="1" fill="hold">
+                                          <p:stCondLst>
+                                            <p:cond delay="0"/>
+                                          </p:stCondLst>
+                                        </p:cTn>
+                                        <p:tgtEl>
+                                          <p:spTgt spid="3">
+                                            <p:txEl>
+                                              <p:pRg st="4" end="4"/>
+                                            </p:txEl>
+                                          </p:spTgt>
+                                        </p:tgtEl>
+                                        <p:attrNameLst>
+                                          <p:attrName>style.visibility</p:attrName>
+                                        </p:attrNameLst>
+                                      </p:cBhvr>
+                                      <p:to>
+                                        <p:strVal val="visible"/>
+                                      </p:to>
+                                    </p:set>
+                                  </p:childTnLst>
+                                </p:cTn>
+                              </p:par>
+                            </p:childTnLst>
+                          </p:cTn>
+                        </p:par>
+                      </p:childTnLst>
+                    </p:cTn>
+                  </p:par>
+                  <p:par>
+                    <p:cTn id="23" fill="hold">
+                      <p:stCondLst>
+                        <p:cond delay="indefinite"/>
+                      </p:stCondLst>
+                      <p:childTnLst>
+                        <p:par>
+                          <p:cTn id="24" fill="hold">
+                            <p:stCondLst>
+                              <p:cond delay="0"/>
+                            </p:stCondLst>
+                            <p:childTnLst>
+                              <p:par>
+                                <p:cTn id="25" presetID="1" presetClass="entr" presetSubtype="0" fill="hold" nodeType="clickEffect">
+                                  <p:stCondLst>
+                                    <p:cond delay="0"/>
+                                  </p:stCondLst>
+                                  <p:childTnLst>
+                                    <p:set>
+                                      <p:cBhvr>
+                                        <p:cTn id="26" dur="1" fill="hold">
+                                          <p:stCondLst>
+                                            <p:cond delay="0"/>
+                                          </p:stCondLst>
+                                        </p:cTn>
+                                        <p:tgtEl>
+                                          <p:spTgt spid="3">
+                                            <p:txEl>
+                                              <p:pRg st="5" end="5"/>
+                                            </p:txEl>
+                                          </p:spTgt>
+                                        </p:tgtEl>
+                                        <p:attrNameLst>
+                                          <p:attrName>style.visibility</p:attrName>
+                                        </p:attrNameLst>
+                                      </p:cBhvr>
+                                      <p:to>
+                                        <p:strVal val="visible"/>
+                                      </p:to>
+                                    </p:set>
+                                  </p:childTnLst>
+                                </p:cTn>
+                              </p:par>
+                            </p:childTnLst>
+                          </p:cTn>
+                        </p:par>
+                      </p:childTnLst>
+                    </p:cTn>
+                  </p:par>
+                  <p:par>
+                    <p:cTn id="27" fill="hold">
+                      <p:stCondLst>
+                        <p:cond delay="indefinite"/>
+                      </p:stCondLst>
+                      <p:childTnLst>
+                        <p:par>
+                          <p:cTn id="28" fill="hold">
+                            <p:stCondLst>
+                              <p:cond delay="0"/>
+                            </p:stCondLst>
+                            <p:childTnLst>
+                              <p:par>
+                                <p:cTn id="29" presetID="1" presetClass="entr" presetSubtype="0" fill="hold" nodeType="clickEffect">
+                                  <p:stCondLst>
+                                    <p:cond delay="0"/>
+                                  </p:stCondLst>
+                                  <p:childTnLst>
+                                    <p:set>
+                                      <p:cBhvr>
+                                        <p:cTn id="30" dur="1" fill="hold">
+                                          <p:stCondLst>
+                                            <p:cond delay="0"/>
+                                          </p:stCondLst>
+                                        </p:cTn>
+                                        <p:tgtEl>
+                                          <p:spTgt spid="3">
+                                            <p:txEl>
+                                              <p:pRg st="6" end="6"/>
+                                            </p:txEl>
+                                          </p:spTgt>
+                                        </p:tgtEl>
+                                        <p:attrNameLst>
+                                          <p:attrName>style.visibility</p:attrName>
+                                        </p:attrNameLst>
+                                      </p:cBhvr>
+                                      <p:to>
+                                        <p:strVal val="visible"/>
+                                      </p:to>
+                                    </p:set>
+                                  </p:childTnLst>
+                                </p:cTn>
+                              </p:par>
+                            </p:childTnLst>
+                          </p:cTn>
+                        </p:par>
+                      </p:childTnLst>
+                    </p:cTn>
+                  </p:par>
+                  <p:par>
+                    <p:cTn id="31" fill="hold">
+                      <p:stCondLst>
+                        <p:cond delay="indefinite"/>
+                      </p:stCondLst>
+                      <p:childTnLst>
+                        <p:par>
+                          <p:cTn id="32" fill="hold">
+                            <p:stCondLst>
+                              <p:cond delay="0"/>
+                            </p:stCondLst>
+                            <p:childTnLst>
+                              <p:par>
+                                <p:cTn id="33" presetID="1" presetClass="entr" presetSubtype="0" fill="hold" nodeType="clickEffect">
+                                  <p:stCondLst>
+                                    <p:cond delay="0"/>
+                                  </p:stCondLst>
+                                  <p:childTnLst>
+                                    <p:set>
+                                      <p:cBhvr>
+                                        <p:cTn id="34" dur="1" fill="hold">
+                                          <p:stCondLst>
+                                            <p:cond delay="0"/>
+                                          </p:stCondLst>
+                                        </p:cTn>
+                                        <p:tgtEl>
+                                          <p:spTgt spid="3">
+                                            <p:txEl>
+                                              <p:pRg st="7" end="7"/>
+                                            </p:txEl>
+                                          </p:spTgt>
+                                        </p:tgtEl>
+                                        <p:attrNameLst>
+                                          <p:attrName>style.visibility</p:attrName>
+                                        </p:attrNameLst>
+                                      </p:cBhvr>
+                                      <p:to>
+                                        <p:strVal val="visible"/>
+                                      </p:to>
+                                    </p:set>
+                                  </p:childTnLst>
+                                </p:cTn>
+                              </p:par>
+                            </p:childTnLst>
+                          </p:cTn>
+                        </p:par>
+                      </p:childTnLst>
+                    </p:cTn>
+                  </p:par>
+                  <p:par>
+                    <p:cTn id="35" fill="hold">
+                      <p:stCondLst>
+                        <p:cond delay="indefinite"/>
+                      </p:stCondLst>
+                      <p:childTnLst>
+                        <p:par>
+                          <p:cTn id="36" fill="hold">
+                            <p:stCondLst>
+                              <p:cond delay="0"/>
+                            </p:stCondLst>
+                            <p:childTnLst>
+                              <p:par>
+                                <p:cTn id="37" presetID="1" presetClass="entr" presetSubtype="0" fill="hold" nodeType="clickEffect">
+                                  <p:stCondLst>
+                                    <p:cond delay="0"/>
+                                  </p:stCondLst>
+                                  <p:childTnLst>
+                                    <p:set>
+                                      <p:cBhvr>
+                                        <p:cTn id="38" dur="1" fill="hold">
+                                          <p:stCondLst>
+                                            <p:cond delay="0"/>
+                                          </p:stCondLst>
+                                        </p:cTn>
+                                        <p:tgtEl>
+                                          <p:spTgt spid="3">
+                                            <p:txEl>
+                                              <p:pRg st="8" end="8"/>
+                                            </p:txEl>
+                                          </p:spTgt>
+                                        </p:tgtEl>
+                                        <p:attrNameLst>
+                                          <p:attrName>style.visibility</p:attrName>
+                                        </p:attrNameLst>
+                                      </p:cBhvr>
+                                      <p:to>
+                                        <p:strVal val="visible"/>
+                                      </p:to>
+                                    </p:set>
+                                  </p:childTnLst>
+                                </p:cTn>
+                              </p:par>
+                            </p:childTnLst>
+                          </p:cTn>
+                        </p:par>
+                      </p:childTnLst>
+                    </p:cTn>
+                  </p:par>
+                  <p:par>
+                    <p:cTn id="39" fill="hold">
+                      <p:stCondLst>
+                        <p:cond delay="indefinite"/>
+                      </p:stCondLst>
+                      <p:childTnLst>
+                        <p:par>
+                          <p:cTn id="40" fill="hold">
+                            <p:stCondLst>
+                              <p:cond delay="0"/>
+                            </p:stCondLst>
+                            <p:childTnLst>
+                              <p:par>
+                                <p:cTn id="41" presetID="1" presetClass="entr" presetSubtype="0" fill="hold" nodeType="clickEffect">
+                                  <p:stCondLst>
+                                    <p:cond delay="0"/>
+                                  </p:stCondLst>
+                                  <p:childTnLst>
+                                    <p:set>
+                                      <p:cBhvr>
+                                        <p:cTn id="42" dur="1" fill="hold">
+                                          <p:stCondLst>
+                                            <p:cond delay="0"/>
+                                          </p:stCondLst>
+                                        </p:cTn>
+                                        <p:tgtEl>
+                                          <p:spTgt spid="3">
+                                            <p:txEl>
+                                              <p:pRg st="9" end="9"/>
+                                            </p:txEl>
+                                          </p:spTgt>
+                                        </p:tgtEl>
+                                        <p:attrNameLst>
+                                          <p:attrName>style.visibility</p:attrName>
+                                        </p:attrNameLst>
+                                      </p:cBhvr>
+                                      <p:to>
+                                        <p:strVal val="visible"/>
+                                      </p:to>
+                                    </p:set>
+                                  </p:childTnLst>
+                                </p:cTn>
+                              </p:par>
+                            </p:childTnLst>
+                          </p:cTn>
+                        </p:par>
+                      </p:childTnLst>
+                    </p:cTn>
+                  </p:par>
+                </p:childTnLst>
+              </p:cTn>
+              <p:prevCondLst>
+                <p:cond evt="onPrev" delay="0">
+                  <p:tgtEl>
+                    <p:sldTgt/>
+                  </p:tgtEl>
+                </p:cond>
+              </p:prevCondLst>
+              <p:nextCondLst>
+                <p:cond evt="onNext" delay="0">
+                  <p:tgtEl>
+                    <p:sldTgt/>
+                  </p:tgtEl>
+                </p:cond>
+              </p:nextCondLst>
+            </p:seq>
+          </p:childTnLst>
+        </p:cTn>
+      </p:par>
+    </p:tnLst>
+  </p:timing>
+</p:sld>
+</file>
+
+<file path=ppt/slides/slide20.xml><?xml version="1.0" encoding="utf-8"?>
+<p:sld xmlns:a="http://schemas.openxmlformats.org/drawingml/2006/main" xmlns:r="http://schemas.openxmlformats.org/officeDocument/2006/relationships" xmlns:p="http://schemas.openxmlformats.org/presentationml/2006/main">
+  <p:cSld>
+    <p:spTree>
+      <p:nvGrpSpPr>
+        <p:cNvPr id="1" name=""/>
+        <p:cNvGrpSpPr/>
+        <p:nvPr/>
+      </p:nvGrpSpPr>
+      <p:grpSpPr>
+        <a:xfrm>
+          <a:off x="0" y="0"/>
+          <a:ext cx="0" cy="0"/>
+          <a:chOff x="0" y="0"/>
+          <a:chExt cx="0" cy="0"/>
+        </a:xfrm>
+      </p:grpSpPr>
+      <p:sp>
+        <p:nvSpPr>
+          <p:cNvPr id="2" name="Title 1">
+            <a:extLst>
+              <a:ext uri="{FF2B5EF4-FFF2-40B4-BE49-F238E27FC236}">
+                <a16:creationId xmlns:a16="http://schemas.microsoft.com/office/drawing/2014/main" id="{22AF2303-ED75-9638-B8BB-47F00634ED28}"/>
+              </a:ext>
+            </a:extLst>
+          </p:cNvPr>
+          <p:cNvSpPr>
+            <a:spLocks noGrp="1"/>
+          </p:cNvSpPr>
+          <p:nvPr>
+            <p:ph type="title"/>
+          </p:nvPr>
+        </p:nvSpPr>
+        <p:spPr/>
+        <p:txBody>
+          <a:bodyPr/>
+          <a:lstStyle/>
+          <a:p>
+            <a:r>
+              <a:rPr lang="en-US" dirty="0"/>
+              <a:t>Fuel Behavior Under Slow Power Transients</a:t>
+            </a:r>
+          </a:p>
+        </p:txBody>
+      </p:sp>
+      <p:sp>
+        <p:nvSpPr>
+          <p:cNvPr id="3" name="Content Placeholder 2">
+            <a:extLst>
+              <a:ext uri="{FF2B5EF4-FFF2-40B4-BE49-F238E27FC236}">
+                <a16:creationId xmlns:a16="http://schemas.microsoft.com/office/drawing/2014/main" id="{46C0E8D4-174A-95F9-A09F-4DC56B52D429}"/>
+              </a:ext>
+            </a:extLst>
+          </p:cNvPr>
+          <p:cNvSpPr>
+            <a:spLocks noGrp="1"/>
+          </p:cNvSpPr>
+          <p:nvPr>
+            <p:ph idx="1"/>
+          </p:nvPr>
+        </p:nvSpPr>
+        <p:spPr/>
+        <p:txBody>
+          <a:bodyPr/>
+          <a:lstStyle/>
+          <a:p>
+            <a:r>
+              <a:rPr lang="en-US" sz="2000" dirty="0"/>
+              <a:t>Despite high fission gas release rate in MOX fuel due to high operation temperature (60-80% release), power increases resulting in higher temperatures also activate fission gas-related phenomena that influence thermal and mechanical pin behavior</a:t>
+            </a:r>
+          </a:p>
+          <a:p>
+            <a:r>
+              <a:rPr lang="en-US" sz="2000" dirty="0"/>
+              <a:t>Intragranular gas migration toward grain boundary related to the thermal gradient</a:t>
+            </a:r>
+          </a:p>
+          <a:p>
+            <a:r>
+              <a:rPr lang="en-US" sz="2000" dirty="0"/>
+              <a:t>Gas bubble growth due to coalescence via vacancy diffusion</a:t>
+            </a:r>
+          </a:p>
+          <a:p>
+            <a:r>
+              <a:rPr lang="en-US" sz="2000" dirty="0"/>
+              <a:t>Fission gas-induced fuel swelling driven by an increase in the bubble pressure</a:t>
+            </a:r>
+          </a:p>
+          <a:p>
+            <a:r>
+              <a:rPr lang="en-US" sz="2000" dirty="0"/>
+              <a:t>Saturation and interconnection of grain boundary bubbles leading to additional gas release</a:t>
+            </a:r>
+          </a:p>
+          <a:p>
+            <a:r>
+              <a:rPr lang="en-US" sz="2000" dirty="0"/>
+              <a:t>Under slow power transients, fuel heat generation and heat removal by the sodium coolant are almost in thermal equilibrium, and these ‘quasi’ steady-state conditions allow the evaluation of the power level at which fuel melting occurs, providing operating limits</a:t>
+            </a:r>
+          </a:p>
+          <a:p>
+            <a:endParaRPr lang="en-US" sz="2000" dirty="0"/>
+          </a:p>
+          <a:p>
+            <a:endParaRPr lang="en-US" sz="2000" dirty="0"/>
+          </a:p>
+          <a:p>
+            <a:endParaRPr lang="en-US" sz="2000" dirty="0"/>
+          </a:p>
+          <a:p>
+            <a:endParaRPr lang="en-US" sz="2000" dirty="0"/>
+          </a:p>
+        </p:txBody>
+      </p:sp>
+      <p:sp>
+        <p:nvSpPr>
+          <p:cNvPr id="4" name="Slide Number Placeholder 3">
+            <a:extLst>
+              <a:ext uri="{FF2B5EF4-FFF2-40B4-BE49-F238E27FC236}">
+                <a16:creationId xmlns:a16="http://schemas.microsoft.com/office/drawing/2014/main" id="{FA2E0889-DC8D-292D-815B-A5B6F87756F1}"/>
+              </a:ext>
+            </a:extLst>
+          </p:cNvPr>
+          <p:cNvSpPr>
+            <a:spLocks noGrp="1"/>
+          </p:cNvSpPr>
+          <p:nvPr>
+            <p:ph type="sldNum" sz="quarter" idx="12"/>
+          </p:nvPr>
+        </p:nvSpPr>
+        <p:spPr/>
+        <p:txBody>
+          <a:bodyPr/>
+          <a:lstStyle/>
+          <a:p>
+            <a:pPr>
+              <a:defRPr/>
+            </a:pPr>
+            <a:fld id="{3FF2C605-4958-CF43-AA48-80339EFDB0AF}" type="slidenum">
+              <a:rPr lang="en-US" smtClean="0"/>
+              <a:pPr>
+                <a:defRPr/>
+              </a:pPr>
+              <a:t>20</a:t>
+            </a:fld>
+            <a:endParaRPr lang="en-US"/>
+          </a:p>
+        </p:txBody>
+      </p:sp>
+    </p:spTree>
+    <p:extLst>
+      <p:ext uri="{BB962C8B-B14F-4D97-AF65-F5344CB8AC3E}">
+        <p14:creationId xmlns:p14="http://schemas.microsoft.com/office/powerpoint/2010/main" val="3309110878"/>
       </p:ext>
     </p:extLst>
   </p:cSld>
@@ -5584,6 +6778,211 @@
           <p:cNvPr id="2" name="Title 1">
             <a:extLst>
               <a:ext uri="{FF2B5EF4-FFF2-40B4-BE49-F238E27FC236}">
+                <a16:creationId xmlns:a16="http://schemas.microsoft.com/office/drawing/2014/main" id="{E84251A8-BC3E-754A-B33C-F5252F2440B6}"/>
+              </a:ext>
+            </a:extLst>
+          </p:cNvPr>
+          <p:cNvSpPr>
+            <a:spLocks noGrp="1"/>
+          </p:cNvSpPr>
+          <p:nvPr>
+            <p:ph type="title"/>
+          </p:nvPr>
+        </p:nvSpPr>
+        <p:spPr/>
+        <p:txBody>
+          <a:bodyPr/>
+          <a:lstStyle/>
+          <a:p>
+            <a:r>
+              <a:rPr lang="en-US" dirty="0"/>
+              <a:t>MOX Restructuring</a:t>
+            </a:r>
+          </a:p>
+        </p:txBody>
+      </p:sp>
+      <p:sp>
+        <p:nvSpPr>
+          <p:cNvPr id="3" name="Content Placeholder 2">
+            <a:extLst>
+              <a:ext uri="{FF2B5EF4-FFF2-40B4-BE49-F238E27FC236}">
+                <a16:creationId xmlns:a16="http://schemas.microsoft.com/office/drawing/2014/main" id="{5C4ABDE3-8DD9-544F-A3F2-B54E2F4CA12A}"/>
+              </a:ext>
+            </a:extLst>
+          </p:cNvPr>
+          <p:cNvSpPr>
+            <a:spLocks noGrp="1"/>
+          </p:cNvSpPr>
+          <p:nvPr>
+            <p:ph idx="1"/>
+          </p:nvPr>
+        </p:nvSpPr>
+        <p:spPr>
+          <a:xfrm>
+            <a:off x="609600" y="1731279"/>
+            <a:ext cx="7470913" cy="4449027"/>
+          </a:xfrm>
+        </p:spPr>
+        <p:txBody>
+          <a:bodyPr/>
+          <a:lstStyle/>
+          <a:p>
+            <a:r>
+              <a:rPr lang="en-US" sz="2000" dirty="0"/>
+              <a:t>Pu bearing fast reactor oxide fuels display four defining regions of a restructured pellet:</a:t>
+            </a:r>
+          </a:p>
+          <a:p>
+            <a:pPr lvl="1"/>
+            <a:r>
+              <a:rPr lang="en-US" sz="2000" dirty="0"/>
+              <a:t>the central void, the columnar grain growth region, the equiaxed grain growth region, and the as-sintered region</a:t>
+            </a:r>
+          </a:p>
+          <a:p>
+            <a:endParaRPr lang="en-US" sz="2000" dirty="0"/>
+          </a:p>
+          <a:p>
+            <a:endParaRPr lang="en-US" sz="2000" dirty="0"/>
+          </a:p>
+        </p:txBody>
+      </p:sp>
+      <p:sp>
+        <p:nvSpPr>
+          <p:cNvPr id="4" name="Slide Number Placeholder 3">
+            <a:extLst>
+              <a:ext uri="{FF2B5EF4-FFF2-40B4-BE49-F238E27FC236}">
+                <a16:creationId xmlns:a16="http://schemas.microsoft.com/office/drawing/2014/main" id="{94770477-52D8-0A4A-9AA5-684FADF01FB4}"/>
+              </a:ext>
+            </a:extLst>
+          </p:cNvPr>
+          <p:cNvSpPr>
+            <a:spLocks noGrp="1"/>
+          </p:cNvSpPr>
+          <p:nvPr>
+            <p:ph type="sldNum" sz="quarter" idx="12"/>
+          </p:nvPr>
+        </p:nvSpPr>
+        <p:spPr/>
+        <p:txBody>
+          <a:bodyPr/>
+          <a:lstStyle/>
+          <a:p>
+            <a:pPr>
+              <a:defRPr/>
+            </a:pPr>
+            <a:fld id="{3FF2C605-4958-CF43-AA48-80339EFDB0AF}" type="slidenum">
+              <a:rPr lang="en-US" smtClean="0"/>
+              <a:pPr>
+                <a:defRPr/>
+              </a:pPr>
+              <a:t>3</a:t>
+            </a:fld>
+            <a:endParaRPr lang="en-US"/>
+          </a:p>
+        </p:txBody>
+      </p:sp>
+      <p:pic>
+        <p:nvPicPr>
+          <p:cNvPr id="5" name="Picture 4">
+            <a:extLst>
+              <a:ext uri="{FF2B5EF4-FFF2-40B4-BE49-F238E27FC236}">
+                <a16:creationId xmlns:a16="http://schemas.microsoft.com/office/drawing/2014/main" id="{6921BB5A-21DE-9744-978F-A4F9A10AE321}"/>
+              </a:ext>
+            </a:extLst>
+          </p:cNvPr>
+          <p:cNvPicPr>
+            <a:picLocks noChangeAspect="1"/>
+          </p:cNvPicPr>
+          <p:nvPr/>
+        </p:nvPicPr>
+        <p:blipFill>
+          <a:blip r:embed="rId2" cstate="email">
+            <a:extLst>
+              <a:ext uri="{28A0092B-C50C-407E-A947-70E740481C1C}">
+                <a14:useLocalDpi xmlns:a14="http://schemas.microsoft.com/office/drawing/2010/main"/>
+              </a:ext>
+            </a:extLst>
+          </a:blip>
+          <a:stretch>
+            <a:fillRect/>
+          </a:stretch>
+        </p:blipFill>
+        <p:spPr>
+          <a:xfrm>
+            <a:off x="7864232" y="2601646"/>
+            <a:ext cx="3536119" cy="3529679"/>
+          </a:xfrm>
+          <a:prstGeom prst="rect">
+            <a:avLst/>
+          </a:prstGeom>
+        </p:spPr>
+      </p:pic>
+      <p:pic>
+        <p:nvPicPr>
+          <p:cNvPr id="6" name="Content Placeholder 5">
+            <a:extLst>
+              <a:ext uri="{FF2B5EF4-FFF2-40B4-BE49-F238E27FC236}">
+                <a16:creationId xmlns:a16="http://schemas.microsoft.com/office/drawing/2014/main" id="{AF3B7627-7C5D-9E46-86D4-BFB79D96273F}"/>
+              </a:ext>
+            </a:extLst>
+          </p:cNvPr>
+          <p:cNvPicPr>
+            <a:picLocks noChangeAspect="1"/>
+          </p:cNvPicPr>
+          <p:nvPr/>
+        </p:nvPicPr>
+        <p:blipFill>
+          <a:blip r:embed="rId3"/>
+          <a:stretch>
+            <a:fillRect/>
+          </a:stretch>
+        </p:blipFill>
+        <p:spPr>
+          <a:xfrm>
+            <a:off x="2073262" y="3294936"/>
+            <a:ext cx="4129326" cy="3243977"/>
+          </a:xfrm>
+          <a:prstGeom prst="rect">
+            <a:avLst/>
+          </a:prstGeom>
+        </p:spPr>
+      </p:pic>
+    </p:spTree>
+    <p:extLst>
+      <p:ext uri="{BB962C8B-B14F-4D97-AF65-F5344CB8AC3E}">
+        <p14:creationId xmlns:p14="http://schemas.microsoft.com/office/powerpoint/2010/main" val="293312973"/>
+      </p:ext>
+    </p:extLst>
+  </p:cSld>
+  <p:clrMapOvr>
+    <a:masterClrMapping/>
+  </p:clrMapOvr>
+</p:sld>
+</file>
+
+<file path=ppt/slides/slide4.xml><?xml version="1.0" encoding="utf-8"?>
+<p:sld xmlns:a="http://schemas.openxmlformats.org/drawingml/2006/main" xmlns:r="http://schemas.openxmlformats.org/officeDocument/2006/relationships" xmlns:p="http://schemas.openxmlformats.org/presentationml/2006/main">
+  <p:cSld>
+    <p:spTree>
+      <p:nvGrpSpPr>
+        <p:cNvPr id="1" name=""/>
+        <p:cNvGrpSpPr/>
+        <p:nvPr/>
+      </p:nvGrpSpPr>
+      <p:grpSpPr>
+        <a:xfrm>
+          <a:off x="0" y="0"/>
+          <a:ext cx="0" cy="0"/>
+          <a:chOff x="0" y="0"/>
+          <a:chExt cx="0" cy="0"/>
+        </a:xfrm>
+      </p:grpSpPr>
+      <p:sp>
+        <p:nvSpPr>
+          <p:cNvPr id="2" name="Title 1">
+            <a:extLst>
+              <a:ext uri="{FF2B5EF4-FFF2-40B4-BE49-F238E27FC236}">
                 <a16:creationId xmlns:a16="http://schemas.microsoft.com/office/drawing/2014/main" id="{9280EE1E-F53A-98F3-67A1-37EDB8B73A51}"/>
               </a:ext>
             </a:extLst>
@@ -5702,7 +7101,7 @@
               <a:pPr>
                 <a:defRPr/>
               </a:pPr>
-              <a:t>3</a:t>
+              <a:t>4</a:t>
             </a:fld>
             <a:endParaRPr lang="en-US" dirty="0"/>
           </a:p>
@@ -5798,7 +7197,7 @@
 </p:sld>
 </file>
 
-<file path=ppt/slides/slide4.xml><?xml version="1.0" encoding="utf-8"?>
+<file path=ppt/slides/slide5.xml><?xml version="1.0" encoding="utf-8"?>
 <p:sld xmlns:a="http://schemas.openxmlformats.org/drawingml/2006/main" xmlns:r="http://schemas.openxmlformats.org/officeDocument/2006/relationships" xmlns:p="http://schemas.openxmlformats.org/presentationml/2006/main">
   <p:cSld>
     <p:spTree>
@@ -5930,7 +7329,7 @@
               <a:pPr>
                 <a:defRPr/>
               </a:pPr>
-              <a:t>4</a:t>
+              <a:t>5</a:t>
             </a:fld>
             <a:endParaRPr lang="en-US"/>
           </a:p>
@@ -6009,7 +7408,7 @@
 </p:sld>
 </file>
 
-<file path=ppt/slides/slide5.xml><?xml version="1.0" encoding="utf-8"?>
+<file path=ppt/slides/slide6.xml><?xml version="1.0" encoding="utf-8"?>
 <p:sld xmlns:a="http://schemas.openxmlformats.org/drawingml/2006/main" xmlns:r="http://schemas.openxmlformats.org/officeDocument/2006/relationships" xmlns:p="http://schemas.openxmlformats.org/presentationml/2006/main">
   <p:cSld>
     <p:spTree>
@@ -6072,7 +7471,7 @@
         </p:nvSpPr>
         <p:spPr>
           <a:xfrm>
-            <a:off x="609600" y="2160495"/>
+            <a:off x="609600" y="1862321"/>
             <a:ext cx="6367670" cy="3965670"/>
           </a:xfrm>
         </p:spPr>
@@ -6116,14 +7515,8 @@
             </a:r>
             <a:r>
               <a:rPr lang="en-US" sz="2000" dirty="0"/>
-              <a:t> diffusion – not known</a:t>
-            </a:r>
-          </a:p>
-          <a:p>
-            <a:endParaRPr lang="en-US" sz="2000" dirty="0"/>
-          </a:p>
-          <a:p>
-            <a:endParaRPr lang="en-US" sz="2000" dirty="0"/>
+              <a:t> diffusion</a:t>
+            </a:r>
           </a:p>
           <a:p>
             <a:endParaRPr lang="en-US" sz="2000" dirty="0"/>
@@ -6159,7 +7552,7 @@
               <a:pPr>
                 <a:defRPr/>
               </a:pPr>
-              <a:t>5</a:t>
+              <a:t>6</a:t>
             </a:fld>
             <a:endParaRPr lang="en-US"/>
           </a:p>
@@ -6238,160 +7631,6 @@
 </p:sld>
 </file>
 
-<file path=ppt/slides/slide6.xml><?xml version="1.0" encoding="utf-8"?>
-<p:sld xmlns:a="http://schemas.openxmlformats.org/drawingml/2006/main" xmlns:r="http://schemas.openxmlformats.org/officeDocument/2006/relationships" xmlns:p="http://schemas.openxmlformats.org/presentationml/2006/main">
-  <p:cSld>
-    <p:spTree>
-      <p:nvGrpSpPr>
-        <p:cNvPr id="1" name=""/>
-        <p:cNvGrpSpPr/>
-        <p:nvPr/>
-      </p:nvGrpSpPr>
-      <p:grpSpPr>
-        <a:xfrm>
-          <a:off x="0" y="0"/>
-          <a:ext cx="0" cy="0"/>
-          <a:chOff x="0" y="0"/>
-          <a:chExt cx="0" cy="0"/>
-        </a:xfrm>
-      </p:grpSpPr>
-      <p:sp>
-        <p:nvSpPr>
-          <p:cNvPr id="2" name="Title 1">
-            <a:extLst>
-              <a:ext uri="{FF2B5EF4-FFF2-40B4-BE49-F238E27FC236}">
-                <a16:creationId xmlns:a16="http://schemas.microsoft.com/office/drawing/2014/main" id="{7A426425-1975-D04D-B9CC-0CC53FDC91C0}"/>
-              </a:ext>
-            </a:extLst>
-          </p:cNvPr>
-          <p:cNvSpPr>
-            <a:spLocks noGrp="1"/>
-          </p:cNvSpPr>
-          <p:nvPr>
-            <p:ph type="title"/>
-          </p:nvPr>
-        </p:nvSpPr>
-        <p:spPr/>
-        <p:txBody>
-          <a:bodyPr/>
-          <a:lstStyle/>
-          <a:p>
-            <a:r>
-              <a:rPr lang="en-US" dirty="0"/>
-              <a:t>Gap Closure</a:t>
-            </a:r>
-          </a:p>
-        </p:txBody>
-      </p:sp>
-      <p:sp>
-        <p:nvSpPr>
-          <p:cNvPr id="3" name="Content Placeholder 2">
-            <a:extLst>
-              <a:ext uri="{FF2B5EF4-FFF2-40B4-BE49-F238E27FC236}">
-                <a16:creationId xmlns:a16="http://schemas.microsoft.com/office/drawing/2014/main" id="{05F664B4-0B38-0648-A64D-9A2A43A43F42}"/>
-              </a:ext>
-            </a:extLst>
-          </p:cNvPr>
-          <p:cNvSpPr>
-            <a:spLocks noGrp="1"/>
-          </p:cNvSpPr>
-          <p:nvPr>
-            <p:ph idx="1"/>
-          </p:nvPr>
-        </p:nvSpPr>
-        <p:spPr/>
-        <p:txBody>
-          <a:bodyPr/>
-          <a:lstStyle/>
-          <a:p>
-            <a:r>
-              <a:rPr lang="en-US" sz="2000" dirty="0"/>
-              <a:t>Although the thermal expansion coefficient is lower in oxide fuel than in austenitic SS cladding, the temperatures in the fuel pellets are much higher than in the cladding and induce a higher thermal expansion in the fuel pellet</a:t>
-            </a:r>
-          </a:p>
-          <a:p>
-            <a:r>
-              <a:rPr lang="en-US" sz="2000" dirty="0"/>
-              <a:t>At high linear powers gap closure is completed after a burnup of about 1% or even less</a:t>
-            </a:r>
-          </a:p>
-          <a:p>
-            <a:r>
-              <a:rPr lang="en-US" sz="2000" dirty="0"/>
-              <a:t>Fuel pellets are broken into several fragments at the end of first rise to power, resulting in a small average displacement of matter toward the cladding</a:t>
-            </a:r>
-          </a:p>
-          <a:p>
-            <a:r>
-              <a:rPr lang="en-US" sz="2000" dirty="0"/>
-              <a:t>Cladding creep down occurs relatively quickly</a:t>
-            </a:r>
-          </a:p>
-          <a:p>
-            <a:r>
-              <a:rPr lang="en-US" sz="2000" dirty="0"/>
-              <a:t>The force exerted on the fuel column by the spring located in the upper rod (in addition to the weight of the fuel column) of causes an axial compression creep outwards of the fuel</a:t>
-            </a:r>
-          </a:p>
-          <a:p>
-            <a:r>
-              <a:rPr lang="en-US" sz="2000" dirty="0"/>
-              <a:t>The main cause of swelling and gap closure is the fission product swelling of the fuel </a:t>
-            </a:r>
-          </a:p>
-          <a:p>
-            <a:endParaRPr lang="en-US" sz="2000" dirty="0"/>
-          </a:p>
-        </p:txBody>
-      </p:sp>
-      <p:sp>
-        <p:nvSpPr>
-          <p:cNvPr id="4" name="Slide Number Placeholder 3">
-            <a:extLst>
-              <a:ext uri="{FF2B5EF4-FFF2-40B4-BE49-F238E27FC236}">
-                <a16:creationId xmlns:a16="http://schemas.microsoft.com/office/drawing/2014/main" id="{7AB73653-CD57-884E-A065-63F212B07577}"/>
-              </a:ext>
-            </a:extLst>
-          </p:cNvPr>
-          <p:cNvSpPr>
-            <a:spLocks noGrp="1"/>
-          </p:cNvSpPr>
-          <p:nvPr>
-            <p:ph type="sldNum" sz="quarter" idx="12"/>
-          </p:nvPr>
-        </p:nvSpPr>
-        <p:spPr/>
-        <p:txBody>
-          <a:bodyPr/>
-          <a:lstStyle/>
-          <a:p>
-            <a:pPr>
-              <a:defRPr/>
-            </a:pPr>
-            <a:fld id="{3FF2C605-4958-CF43-AA48-80339EFDB0AF}" type="slidenum">
-              <a:rPr lang="en-US" smtClean="0"/>
-              <a:pPr>
-                <a:defRPr/>
-              </a:pPr>
-              <a:t>6</a:t>
-            </a:fld>
-            <a:endParaRPr lang="en-US"/>
-          </a:p>
-        </p:txBody>
-      </p:sp>
-    </p:spTree>
-    <p:extLst>
-      <p:ext uri="{BB962C8B-B14F-4D97-AF65-F5344CB8AC3E}">
-        <p14:creationId xmlns:p14="http://schemas.microsoft.com/office/powerpoint/2010/main" val="2284134872"/>
-      </p:ext>
-    </p:extLst>
-  </p:cSld>
-  <p:clrMapOvr>
-    <a:masterClrMapping/>
-  </p:clrMapOvr>
-</p:sld>
-</file>
-
 <file path=ppt/slides/slide7.xml><?xml version="1.0" encoding="utf-8"?>
 <p:sld xmlns:a="http://schemas.openxmlformats.org/drawingml/2006/main" xmlns:r="http://schemas.openxmlformats.org/officeDocument/2006/relationships" xmlns:p="http://schemas.openxmlformats.org/presentationml/2006/main">
   <p:cSld>
@@ -6414,7 +7653,7 @@
           <p:cNvPr id="2" name="Title 1">
             <a:extLst>
               <a:ext uri="{FF2B5EF4-FFF2-40B4-BE49-F238E27FC236}">
-                <a16:creationId xmlns:a16="http://schemas.microsoft.com/office/drawing/2014/main" id="{BF7019E5-DA94-F94C-AD25-4FBEC1006151}"/>
+                <a16:creationId xmlns:a16="http://schemas.microsoft.com/office/drawing/2014/main" id="{7A426425-1975-D04D-B9CC-0CC53FDC91C0}"/>
               </a:ext>
             </a:extLst>
           </p:cNvPr>
@@ -6432,7 +7671,7 @@
           <a:p>
             <a:r>
               <a:rPr lang="en-US" dirty="0"/>
-              <a:t>Fission Products</a:t>
+              <a:t>Gap Closure</a:t>
             </a:r>
           </a:p>
         </p:txBody>
@@ -6442,7 +7681,7 @@
           <p:cNvPr id="3" name="Content Placeholder 2">
             <a:extLst>
               <a:ext uri="{FF2B5EF4-FFF2-40B4-BE49-F238E27FC236}">
-                <a16:creationId xmlns:a16="http://schemas.microsoft.com/office/drawing/2014/main" id="{9B3E3842-85CB-E14B-AA13-1ECCB597D916}"/>
+                <a16:creationId xmlns:a16="http://schemas.microsoft.com/office/drawing/2014/main" id="{05F664B4-0B38-0648-A64D-9A2A43A43F42}"/>
               </a:ext>
             </a:extLst>
           </p:cNvPr>
@@ -6460,44 +7699,38 @@
           <a:p>
             <a:r>
               <a:rPr lang="en-US" sz="2000" dirty="0"/>
-              <a:t>The main objective of oxide fuels in fast reactors is to achieve very high burnup; 15 at.% or even more is typically considered as a reference target</a:t>
-            </a:r>
-          </a:p>
-          <a:p>
-            <a:r>
-              <a:rPr lang="en-US" sz="2000" dirty="0"/>
-              <a:t>This means that at the end of irradiation, 15% of the initial actinide atoms (U and Pu) have disappeared and ~26% atoms present in the fuel are FPs</a:t>
-            </a:r>
-          </a:p>
-          <a:p>
-            <a:r>
-              <a:rPr lang="en-US" sz="2000" dirty="0"/>
-              <a:t>All physical and chemical properties of oxide fuel will continuously evolve during its lifetime in the reactor; in particular, fission products will decrease the thermal conductivity and the melting point, thus reducing the margin to fuel melting</a:t>
-            </a:r>
-          </a:p>
-          <a:p>
-            <a:r>
-              <a:rPr lang="en-US" sz="2000" dirty="0"/>
-              <a:t>Most phenomena occurring in the fuel pins will be a direct consequence of these fission products</a:t>
-            </a:r>
-          </a:p>
-          <a:p>
-            <a:r>
-              <a:rPr lang="en-US" sz="2000" dirty="0"/>
-              <a:t>This large amount of fission products is one of the specificities of fast oxide fuel</a:t>
-            </a:r>
-          </a:p>
-          <a:p>
-            <a:r>
-              <a:rPr lang="en-US" sz="2000" dirty="0"/>
-              <a:t>The fission products effects depend upon the chemical state of the fission product, which is influenced by the oxygen potential of the fuel</a:t>
-            </a:r>
-          </a:p>
-          <a:p>
-            <a:endParaRPr lang="en-US" sz="2000" dirty="0"/>
-          </a:p>
-          <a:p>
-            <a:endParaRPr lang="en-US" sz="2000" dirty="0"/>
+              <a:t>Although the thermal expansion coefficient is lower in oxide fuel than in austenitic SS cladding, the temperatures in the fuel pellets are much higher than in the cladding and induce a higher thermal expansion in the fuel pellet</a:t>
+            </a:r>
+          </a:p>
+          <a:p>
+            <a:r>
+              <a:rPr lang="en-US" sz="2000" dirty="0"/>
+              <a:t>At high linear powers gap closure is completed after a burnup of about 1% or even less</a:t>
+            </a:r>
+          </a:p>
+          <a:p>
+            <a:r>
+              <a:rPr lang="en-US" sz="2000" dirty="0"/>
+              <a:t>Fuel pellets are broken into several fragments at the end of first rise to power, resulting in a small average displacement of matter toward the cladding</a:t>
+            </a:r>
+          </a:p>
+          <a:p>
+            <a:r>
+              <a:rPr lang="en-US" sz="2000" dirty="0"/>
+              <a:t>Cladding creep down occurs relatively quickly</a:t>
+            </a:r>
+          </a:p>
+          <a:p>
+            <a:r>
+              <a:rPr lang="en-US" sz="2000" dirty="0"/>
+              <a:t>The force exerted on the fuel column by the spring located in the upper rod (in addition to the weight of the fuel column) of causes an axial compression creep outwards of the fuel</a:t>
+            </a:r>
+          </a:p>
+          <a:p>
+            <a:r>
+              <a:rPr lang="en-US" sz="2000" dirty="0"/>
+              <a:t>The main cause of swelling and gap closure is the fission product swelling of the fuel </a:t>
+            </a:r>
           </a:p>
           <a:p>
             <a:endParaRPr lang="en-US" sz="2000" dirty="0"/>
@@ -6509,7 +7742,7 @@
           <p:cNvPr id="4" name="Slide Number Placeholder 3">
             <a:extLst>
               <a:ext uri="{FF2B5EF4-FFF2-40B4-BE49-F238E27FC236}">
-                <a16:creationId xmlns:a16="http://schemas.microsoft.com/office/drawing/2014/main" id="{64F273F9-D0F0-2C41-9811-22B9889ACA3C}"/>
+                <a16:creationId xmlns:a16="http://schemas.microsoft.com/office/drawing/2014/main" id="{7AB73653-CD57-884E-A065-63F212B07577}"/>
               </a:ext>
             </a:extLst>
           </p:cNvPr>
@@ -6542,7 +7775,7 @@
     </p:spTree>
     <p:extLst>
       <p:ext uri="{BB962C8B-B14F-4D97-AF65-F5344CB8AC3E}">
-        <p14:creationId xmlns:p14="http://schemas.microsoft.com/office/powerpoint/2010/main" val="3986632092"/>
+        <p14:creationId xmlns:p14="http://schemas.microsoft.com/office/powerpoint/2010/main" val="2284134872"/>
       </p:ext>
     </p:extLst>
   </p:cSld>
@@ -6574,6 +7807,160 @@
           <p:cNvPr id="2" name="Title 1">
             <a:extLst>
               <a:ext uri="{FF2B5EF4-FFF2-40B4-BE49-F238E27FC236}">
+                <a16:creationId xmlns:a16="http://schemas.microsoft.com/office/drawing/2014/main" id="{BF7019E5-DA94-F94C-AD25-4FBEC1006151}"/>
+              </a:ext>
+            </a:extLst>
+          </p:cNvPr>
+          <p:cNvSpPr>
+            <a:spLocks noGrp="1"/>
+          </p:cNvSpPr>
+          <p:nvPr>
+            <p:ph type="title"/>
+          </p:nvPr>
+        </p:nvSpPr>
+        <p:spPr/>
+        <p:txBody>
+          <a:bodyPr/>
+          <a:lstStyle/>
+          <a:p>
+            <a:r>
+              <a:rPr lang="en-US" dirty="0"/>
+              <a:t>Fission Products</a:t>
+            </a:r>
+          </a:p>
+        </p:txBody>
+      </p:sp>
+      <p:sp>
+        <p:nvSpPr>
+          <p:cNvPr id="3" name="Content Placeholder 2">
+            <a:extLst>
+              <a:ext uri="{FF2B5EF4-FFF2-40B4-BE49-F238E27FC236}">
+                <a16:creationId xmlns:a16="http://schemas.microsoft.com/office/drawing/2014/main" id="{9B3E3842-85CB-E14B-AA13-1ECCB597D916}"/>
+              </a:ext>
+            </a:extLst>
+          </p:cNvPr>
+          <p:cNvSpPr>
+            <a:spLocks noGrp="1"/>
+          </p:cNvSpPr>
+          <p:nvPr>
+            <p:ph idx="1"/>
+          </p:nvPr>
+        </p:nvSpPr>
+        <p:spPr/>
+        <p:txBody>
+          <a:bodyPr/>
+          <a:lstStyle/>
+          <a:p>
+            <a:r>
+              <a:rPr lang="en-US" sz="2000" dirty="0"/>
+              <a:t>The main objective of oxide fuels in fast reactors is to achieve very high burnup; 15 at.% or even more is typically considered as a reference target</a:t>
+            </a:r>
+          </a:p>
+          <a:p>
+            <a:r>
+              <a:rPr lang="en-US" sz="2000" dirty="0"/>
+              <a:t>This means that at the end of irradiation, 15% of the initial actinide atoms (U and Pu) have disappeared and ~26% atoms present in the fuel are FPs</a:t>
+            </a:r>
+          </a:p>
+          <a:p>
+            <a:r>
+              <a:rPr lang="en-US" sz="2000" dirty="0"/>
+              <a:t>All physical and chemical properties of oxide fuel will continuously evolve during its lifetime in the reactor; in particular, fission products will decrease the thermal conductivity and the melting point, thus reducing the margin to fuel melting</a:t>
+            </a:r>
+          </a:p>
+          <a:p>
+            <a:r>
+              <a:rPr lang="en-US" sz="2000" dirty="0"/>
+              <a:t>Most phenomena occurring in the fuel pins will be a direct consequence of these fission products</a:t>
+            </a:r>
+          </a:p>
+          <a:p>
+            <a:r>
+              <a:rPr lang="en-US" sz="2000" dirty="0"/>
+              <a:t>This large amount of fission products is one of the specificities of fast oxide fuel</a:t>
+            </a:r>
+          </a:p>
+          <a:p>
+            <a:r>
+              <a:rPr lang="en-US" sz="2000" dirty="0"/>
+              <a:t>The fission product effects depend upon the chemical state of the fission product, which is influenced by the oxygen potential of the fuel</a:t>
+            </a:r>
+          </a:p>
+          <a:p>
+            <a:endParaRPr lang="en-US" sz="2000" dirty="0"/>
+          </a:p>
+        </p:txBody>
+      </p:sp>
+      <p:sp>
+        <p:nvSpPr>
+          <p:cNvPr id="4" name="Slide Number Placeholder 3">
+            <a:extLst>
+              <a:ext uri="{FF2B5EF4-FFF2-40B4-BE49-F238E27FC236}">
+                <a16:creationId xmlns:a16="http://schemas.microsoft.com/office/drawing/2014/main" id="{64F273F9-D0F0-2C41-9811-22B9889ACA3C}"/>
+              </a:ext>
+            </a:extLst>
+          </p:cNvPr>
+          <p:cNvSpPr>
+            <a:spLocks noGrp="1"/>
+          </p:cNvSpPr>
+          <p:nvPr>
+            <p:ph type="sldNum" sz="quarter" idx="12"/>
+          </p:nvPr>
+        </p:nvSpPr>
+        <p:spPr/>
+        <p:txBody>
+          <a:bodyPr/>
+          <a:lstStyle/>
+          <a:p>
+            <a:pPr>
+              <a:defRPr/>
+            </a:pPr>
+            <a:fld id="{3FF2C605-4958-CF43-AA48-80339EFDB0AF}" type="slidenum">
+              <a:rPr lang="en-US" smtClean="0"/>
+              <a:pPr>
+                <a:defRPr/>
+              </a:pPr>
+              <a:t>8</a:t>
+            </a:fld>
+            <a:endParaRPr lang="en-US"/>
+          </a:p>
+        </p:txBody>
+      </p:sp>
+    </p:spTree>
+    <p:extLst>
+      <p:ext uri="{BB962C8B-B14F-4D97-AF65-F5344CB8AC3E}">
+        <p14:creationId xmlns:p14="http://schemas.microsoft.com/office/powerpoint/2010/main" val="3986632092"/>
+      </p:ext>
+    </p:extLst>
+  </p:cSld>
+  <p:clrMapOvr>
+    <a:masterClrMapping/>
+  </p:clrMapOvr>
+</p:sld>
+</file>
+
+<file path=ppt/slides/slide9.xml><?xml version="1.0" encoding="utf-8"?>
+<p:sld xmlns:a="http://schemas.openxmlformats.org/drawingml/2006/main" xmlns:r="http://schemas.openxmlformats.org/officeDocument/2006/relationships" xmlns:p="http://schemas.openxmlformats.org/presentationml/2006/main">
+  <p:cSld>
+    <p:spTree>
+      <p:nvGrpSpPr>
+        <p:cNvPr id="1" name=""/>
+        <p:cNvGrpSpPr/>
+        <p:nvPr/>
+      </p:nvGrpSpPr>
+      <p:grpSpPr>
+        <a:xfrm>
+          <a:off x="0" y="0"/>
+          <a:ext cx="0" cy="0"/>
+          <a:chOff x="0" y="0"/>
+          <a:chExt cx="0" cy="0"/>
+        </a:xfrm>
+      </p:grpSpPr>
+      <p:sp>
+        <p:nvSpPr>
+          <p:cNvPr id="2" name="Title 1">
+            <a:extLst>
+              <a:ext uri="{FF2B5EF4-FFF2-40B4-BE49-F238E27FC236}">
                 <a16:creationId xmlns:a16="http://schemas.microsoft.com/office/drawing/2014/main" id="{45D76C62-1E50-BE44-8E45-171B5AE49206}"/>
               </a:ext>
             </a:extLst>
@@ -6699,7 +8086,7 @@
               <a:pPr>
                 <a:defRPr/>
               </a:pPr>
-              <a:t>8</a:t>
+              <a:t>9</a:t>
             </a:fld>
             <a:endParaRPr lang="en-US"/>
           </a:p>
@@ -6739,204 +8126,6 @@
     <p:extLst>
       <p:ext uri="{BB962C8B-B14F-4D97-AF65-F5344CB8AC3E}">
         <p14:creationId xmlns:p14="http://schemas.microsoft.com/office/powerpoint/2010/main" val="240196182"/>
-      </p:ext>
-    </p:extLst>
-  </p:cSld>
-  <p:clrMapOvr>
-    <a:masterClrMapping/>
-  </p:clrMapOvr>
-</p:sld>
-</file>
-
-<file path=ppt/slides/slide9.xml><?xml version="1.0" encoding="utf-8"?>
-<p:sld xmlns:a="http://schemas.openxmlformats.org/drawingml/2006/main" xmlns:r="http://schemas.openxmlformats.org/officeDocument/2006/relationships" xmlns:p="http://schemas.openxmlformats.org/presentationml/2006/main">
-  <p:cSld>
-    <p:spTree>
-      <p:nvGrpSpPr>
-        <p:cNvPr id="1" name=""/>
-        <p:cNvGrpSpPr/>
-        <p:nvPr/>
-      </p:nvGrpSpPr>
-      <p:grpSpPr>
-        <a:xfrm>
-          <a:off x="0" y="0"/>
-          <a:ext cx="0" cy="0"/>
-          <a:chOff x="0" y="0"/>
-          <a:chExt cx="0" cy="0"/>
-        </a:xfrm>
-      </p:grpSpPr>
-      <p:sp>
-        <p:nvSpPr>
-          <p:cNvPr id="2" name="Title 1">
-            <a:extLst>
-              <a:ext uri="{FF2B5EF4-FFF2-40B4-BE49-F238E27FC236}">
-                <a16:creationId xmlns:a16="http://schemas.microsoft.com/office/drawing/2014/main" id="{5DA4B22D-5AD2-0C01-57FF-9D8E0229C6FE}"/>
-              </a:ext>
-            </a:extLst>
-          </p:cNvPr>
-          <p:cNvSpPr>
-            <a:spLocks noGrp="1"/>
-          </p:cNvSpPr>
-          <p:nvPr>
-            <p:ph type="title"/>
-          </p:nvPr>
-        </p:nvSpPr>
-        <p:spPr/>
-        <p:txBody>
-          <a:bodyPr/>
-          <a:lstStyle/>
-          <a:p>
-            <a:r>
-              <a:rPr lang="en-US" dirty="0"/>
-              <a:t>O/M Ratio</a:t>
-            </a:r>
-          </a:p>
-        </p:txBody>
-      </p:sp>
-      <p:sp>
-        <p:nvSpPr>
-          <p:cNvPr id="3" name="Content Placeholder 2">
-            <a:extLst>
-              <a:ext uri="{FF2B5EF4-FFF2-40B4-BE49-F238E27FC236}">
-                <a16:creationId xmlns:a16="http://schemas.microsoft.com/office/drawing/2014/main" id="{BB118308-AF23-B971-2B1A-ECBD5680B7C1}"/>
-              </a:ext>
-            </a:extLst>
-          </p:cNvPr>
-          <p:cNvSpPr>
-            <a:spLocks noGrp="1"/>
-          </p:cNvSpPr>
-          <p:nvPr>
-            <p:ph idx="1"/>
-          </p:nvPr>
-        </p:nvSpPr>
-        <p:spPr>
-          <a:xfrm>
-            <a:off x="609600" y="2160495"/>
-            <a:ext cx="5862638" cy="3965670"/>
-          </a:xfrm>
-        </p:spPr>
-        <p:txBody>
-          <a:bodyPr/>
-          <a:lstStyle/>
-          <a:p>
-            <a:r>
-              <a:rPr lang="en-US" dirty="0"/>
-              <a:t>Fission releases two oxygen atoms, which cannot be fully bound by the fission products, this increases the O potential in the fuel as dissolved O</a:t>
-            </a:r>
-          </a:p>
-          <a:p>
-            <a:r>
-              <a:rPr lang="en-US" dirty="0"/>
-              <a:t>The O potential increases until the point where Mo starts to oxidize, leaving the metallic inclusions</a:t>
-            </a:r>
-          </a:p>
-          <a:p>
-            <a:r>
-              <a:rPr lang="en-US" dirty="0"/>
-              <a:t>The O/M ratio increases until Mo starts to oxidize, then maintains at approximately 2.0 or thereabouts</a:t>
-            </a:r>
-          </a:p>
-        </p:txBody>
-      </p:sp>
-      <p:sp>
-        <p:nvSpPr>
-          <p:cNvPr id="4" name="Slide Number Placeholder 3">
-            <a:extLst>
-              <a:ext uri="{FF2B5EF4-FFF2-40B4-BE49-F238E27FC236}">
-                <a16:creationId xmlns:a16="http://schemas.microsoft.com/office/drawing/2014/main" id="{09AFC33D-A569-C085-55CF-C662BA30B006}"/>
-              </a:ext>
-            </a:extLst>
-          </p:cNvPr>
-          <p:cNvSpPr>
-            <a:spLocks noGrp="1"/>
-          </p:cNvSpPr>
-          <p:nvPr>
-            <p:ph type="sldNum" sz="quarter" idx="12"/>
-          </p:nvPr>
-        </p:nvSpPr>
-        <p:spPr/>
-        <p:txBody>
-          <a:bodyPr/>
-          <a:lstStyle/>
-          <a:p>
-            <a:pPr>
-              <a:defRPr/>
-            </a:pPr>
-            <a:fld id="{3FF2C605-4958-CF43-AA48-80339EFDB0AF}" type="slidenum">
-              <a:rPr lang="en-US" smtClean="0"/>
-              <a:pPr>
-                <a:defRPr/>
-              </a:pPr>
-              <a:t>9</a:t>
-            </a:fld>
-            <a:endParaRPr lang="en-US"/>
-          </a:p>
-        </p:txBody>
-      </p:sp>
-      <p:pic>
-        <p:nvPicPr>
-          <p:cNvPr id="5" name="Picture 4">
-            <a:extLst>
-              <a:ext uri="{FF2B5EF4-FFF2-40B4-BE49-F238E27FC236}">
-                <a16:creationId xmlns:a16="http://schemas.microsoft.com/office/drawing/2014/main" id="{A9E9DAD9-5332-5810-12F7-17AE61FDF0E7}"/>
-              </a:ext>
-            </a:extLst>
-          </p:cNvPr>
-          <p:cNvPicPr>
-            <a:picLocks noChangeAspect="1"/>
-          </p:cNvPicPr>
-          <p:nvPr/>
-        </p:nvPicPr>
-        <p:blipFill>
-          <a:blip r:embed="rId2"/>
-          <a:stretch>
-            <a:fillRect/>
-          </a:stretch>
-        </p:blipFill>
-        <p:spPr>
-          <a:xfrm>
-            <a:off x="6654680" y="3822701"/>
-            <a:ext cx="5327769" cy="2533650"/>
-          </a:xfrm>
-          <a:prstGeom prst="rect">
-            <a:avLst/>
-          </a:prstGeom>
-        </p:spPr>
-      </p:pic>
-      <p:pic>
-        <p:nvPicPr>
-          <p:cNvPr id="6" name="Picture 5">
-            <a:extLst>
-              <a:ext uri="{FF2B5EF4-FFF2-40B4-BE49-F238E27FC236}">
-                <a16:creationId xmlns:a16="http://schemas.microsoft.com/office/drawing/2014/main" id="{ABB42B93-F59E-5375-D773-FDC1EDAFFA1F}"/>
-              </a:ext>
-            </a:extLst>
-          </p:cNvPr>
-          <p:cNvPicPr>
-            <a:picLocks noChangeAspect="1"/>
-          </p:cNvPicPr>
-          <p:nvPr/>
-        </p:nvPicPr>
-        <p:blipFill>
-          <a:blip r:embed="rId3"/>
-          <a:stretch>
-            <a:fillRect/>
-          </a:stretch>
-        </p:blipFill>
-        <p:spPr>
-          <a:xfrm>
-            <a:off x="7184964" y="1122363"/>
-            <a:ext cx="4267200" cy="2569803"/>
-          </a:xfrm>
-          <a:prstGeom prst="rect">
-            <a:avLst/>
-          </a:prstGeom>
-        </p:spPr>
-      </p:pic>
-    </p:spTree>
-    <p:extLst>
-      <p:ext uri="{BB962C8B-B14F-4D97-AF65-F5344CB8AC3E}">
-        <p14:creationId xmlns:p14="http://schemas.microsoft.com/office/powerpoint/2010/main" val="109773984"/>
       </p:ext>
     </p:extLst>
   </p:cSld>
@@ -7264,4 +8453,319 @@
   </a:objectDefaults>
   <a:extraClrSchemeLst/>
 </a:theme>
+</file>
+
+<file path=ppt/theme/theme2.xml><?xml version="1.0" encoding="utf-8"?>
+<a:theme xmlns:a="http://schemas.openxmlformats.org/drawingml/2006/main" name="Office Theme">
+  <a:themeElements>
+    <a:clrScheme name="Office">
+      <a:dk1>
+        <a:sysClr val="windowText" lastClr="000000"/>
+      </a:dk1>
+      <a:lt1>
+        <a:sysClr val="window" lastClr="FFFFFF"/>
+      </a:lt1>
+      <a:dk2>
+        <a:srgbClr val="0E2841"/>
+      </a:dk2>
+      <a:lt2>
+        <a:srgbClr val="E8E8E8"/>
+      </a:lt2>
+      <a:accent1>
+        <a:srgbClr val="156082"/>
+      </a:accent1>
+      <a:accent2>
+        <a:srgbClr val="E97132"/>
+      </a:accent2>
+      <a:accent3>
+        <a:srgbClr val="196B24"/>
+      </a:accent3>
+      <a:accent4>
+        <a:srgbClr val="0F9ED5"/>
+      </a:accent4>
+      <a:accent5>
+        <a:srgbClr val="A02B93"/>
+      </a:accent5>
+      <a:accent6>
+        <a:srgbClr val="4EA72E"/>
+      </a:accent6>
+      <a:hlink>
+        <a:srgbClr val="467886"/>
+      </a:hlink>
+      <a:folHlink>
+        <a:srgbClr val="96607D"/>
+      </a:folHlink>
+    </a:clrScheme>
+    <a:fontScheme name="Office">
+      <a:majorFont>
+        <a:latin typeface="Aptos Display" panose="02110004020202020204"/>
+        <a:ea typeface=""/>
+        <a:cs typeface=""/>
+        <a:font script="Jpan" typeface="游ゴシック Light"/>
+        <a:font script="Hang" typeface="맑은 고딕"/>
+        <a:font script="Hans" typeface="等线 Light"/>
+        <a:font script="Hant" typeface="新細明體"/>
+        <a:font script="Arab" typeface="Times New Roman"/>
+        <a:font script="Hebr" typeface="Times New Roman"/>
+        <a:font script="Thai" typeface="Angsana New"/>
+        <a:font script="Ethi" typeface="Nyala"/>
+        <a:font script="Beng" typeface="Vrinda"/>
+        <a:font script="Gujr" typeface="Shruti"/>
+        <a:font script="Khmr" typeface="MoolBoran"/>
+        <a:font script="Knda" typeface="Tunga"/>
+        <a:font script="Guru" typeface="Raavi"/>
+        <a:font script="Cans" typeface="Euphemia"/>
+        <a:font script="Cher" typeface="Plantagenet Cherokee"/>
+        <a:font script="Yiii" typeface="Microsoft Yi Baiti"/>
+        <a:font script="Tibt" typeface="Microsoft Himalaya"/>
+        <a:font script="Thaa" typeface="MV Boli"/>
+        <a:font script="Deva" typeface="Mangal"/>
+        <a:font script="Telu" typeface="Gautami"/>
+        <a:font script="Taml" typeface="Latha"/>
+        <a:font script="Syrc" typeface="Estrangelo Edessa"/>
+        <a:font script="Orya" typeface="Kalinga"/>
+        <a:font script="Mlym" typeface="Kartika"/>
+        <a:font script="Laoo" typeface="DokChampa"/>
+        <a:font script="Sinh" typeface="Iskoola Pota"/>
+        <a:font script="Mong" typeface="Mongolian Baiti"/>
+        <a:font script="Viet" typeface="Times New Roman"/>
+        <a:font script="Uigh" typeface="Microsoft Uighur"/>
+        <a:font script="Geor" typeface="Sylfaen"/>
+        <a:font script="Armn" typeface="Arial"/>
+        <a:font script="Bugi" typeface="Leelawadee UI"/>
+        <a:font script="Bopo" typeface="Microsoft JhengHei"/>
+        <a:font script="Java" typeface="Javanese Text"/>
+        <a:font script="Lisu" typeface="Segoe UI"/>
+        <a:font script="Mymr" typeface="Myanmar Text"/>
+        <a:font script="Nkoo" typeface="Ebrima"/>
+        <a:font script="Olck" typeface="Nirmala UI"/>
+        <a:font script="Osma" typeface="Ebrima"/>
+        <a:font script="Phag" typeface="Phagspa"/>
+        <a:font script="Syrn" typeface="Estrangelo Edessa"/>
+        <a:font script="Syrj" typeface="Estrangelo Edessa"/>
+        <a:font script="Syre" typeface="Estrangelo Edessa"/>
+        <a:font script="Sora" typeface="Nirmala UI"/>
+        <a:font script="Tale" typeface="Microsoft Tai Le"/>
+        <a:font script="Talu" typeface="Microsoft New Tai Lue"/>
+        <a:font script="Tfng" typeface="Ebrima"/>
+      </a:majorFont>
+      <a:minorFont>
+        <a:latin typeface="Aptos" panose="02110004020202020204"/>
+        <a:ea typeface=""/>
+        <a:cs typeface=""/>
+        <a:font script="Jpan" typeface="游ゴシック"/>
+        <a:font script="Hang" typeface="맑은 고딕"/>
+        <a:font script="Hans" typeface="等线"/>
+        <a:font script="Hant" typeface="新細明體"/>
+        <a:font script="Arab" typeface="Arial"/>
+        <a:font script="Hebr" typeface="Arial"/>
+        <a:font script="Thai" typeface="Cordia New"/>
+        <a:font script="Ethi" typeface="Nyala"/>
+        <a:font script="Beng" typeface="Vrinda"/>
+        <a:font script="Gujr" typeface="Shruti"/>
+        <a:font script="Khmr" typeface="DaunPenh"/>
+        <a:font script="Knda" typeface="Tunga"/>
+        <a:font script="Guru" typeface="Raavi"/>
+        <a:font script="Cans" typeface="Euphemia"/>
+        <a:font script="Cher" typeface="Plantagenet Cherokee"/>
+        <a:font script="Yiii" typeface="Microsoft Yi Baiti"/>
+        <a:font script="Tibt" typeface="Microsoft Himalaya"/>
+        <a:font script="Thaa" typeface="MV Boli"/>
+        <a:font script="Deva" typeface="Mangal"/>
+        <a:font script="Telu" typeface="Gautami"/>
+        <a:font script="Taml" typeface="Latha"/>
+        <a:font script="Syrc" typeface="Estrangelo Edessa"/>
+        <a:font script="Orya" typeface="Kalinga"/>
+        <a:font script="Mlym" typeface="Kartika"/>
+        <a:font script="Laoo" typeface="DokChampa"/>
+        <a:font script="Sinh" typeface="Iskoola Pota"/>
+        <a:font script="Mong" typeface="Mongolian Baiti"/>
+        <a:font script="Viet" typeface="Arial"/>
+        <a:font script="Uigh" typeface="Microsoft Uighur"/>
+        <a:font script="Geor" typeface="Sylfaen"/>
+        <a:font script="Armn" typeface="Arial"/>
+        <a:font script="Bugi" typeface="Leelawadee UI"/>
+        <a:font script="Bopo" typeface="Microsoft JhengHei"/>
+        <a:font script="Java" typeface="Javanese Text"/>
+        <a:font script="Lisu" typeface="Segoe UI"/>
+        <a:font script="Mymr" typeface="Myanmar Text"/>
+        <a:font script="Nkoo" typeface="Ebrima"/>
+        <a:font script="Olck" typeface="Nirmala UI"/>
+        <a:font script="Osma" typeface="Ebrima"/>
+        <a:font script="Phag" typeface="Phagspa"/>
+        <a:font script="Syrn" typeface="Estrangelo Edessa"/>
+        <a:font script="Syrj" typeface="Estrangelo Edessa"/>
+        <a:font script="Syre" typeface="Estrangelo Edessa"/>
+        <a:font script="Sora" typeface="Nirmala UI"/>
+        <a:font script="Tale" typeface="Microsoft Tai Le"/>
+        <a:font script="Talu" typeface="Microsoft New Tai Lue"/>
+        <a:font script="Tfng" typeface="Ebrima"/>
+      </a:minorFont>
+    </a:fontScheme>
+    <a:fmtScheme name="Office">
+      <a:fillStyleLst>
+        <a:solidFill>
+          <a:schemeClr val="phClr"/>
+        </a:solidFill>
+        <a:gradFill rotWithShape="1">
+          <a:gsLst>
+            <a:gs pos="0">
+              <a:schemeClr val="phClr">
+                <a:lumMod val="110000"/>
+                <a:satMod val="105000"/>
+                <a:tint val="67000"/>
+              </a:schemeClr>
+            </a:gs>
+            <a:gs pos="50000">
+              <a:schemeClr val="phClr">
+                <a:lumMod val="105000"/>
+                <a:satMod val="103000"/>
+                <a:tint val="73000"/>
+              </a:schemeClr>
+            </a:gs>
+            <a:gs pos="100000">
+              <a:schemeClr val="phClr">
+                <a:lumMod val="105000"/>
+                <a:satMod val="109000"/>
+                <a:tint val="81000"/>
+              </a:schemeClr>
+            </a:gs>
+          </a:gsLst>
+          <a:lin ang="5400000" scaled="0"/>
+        </a:gradFill>
+        <a:gradFill rotWithShape="1">
+          <a:gsLst>
+            <a:gs pos="0">
+              <a:schemeClr val="phClr">
+                <a:satMod val="103000"/>
+                <a:lumMod val="102000"/>
+                <a:tint val="94000"/>
+              </a:schemeClr>
+            </a:gs>
+            <a:gs pos="50000">
+              <a:schemeClr val="phClr">
+                <a:satMod val="110000"/>
+                <a:lumMod val="100000"/>
+                <a:shade val="100000"/>
+              </a:schemeClr>
+            </a:gs>
+            <a:gs pos="100000">
+              <a:schemeClr val="phClr">
+                <a:lumMod val="99000"/>
+                <a:satMod val="120000"/>
+                <a:shade val="78000"/>
+              </a:schemeClr>
+            </a:gs>
+          </a:gsLst>
+          <a:lin ang="5400000" scaled="0"/>
+        </a:gradFill>
+      </a:fillStyleLst>
+      <a:lnStyleLst>
+        <a:ln w="12700" cap="flat" cmpd="sng" algn="ctr">
+          <a:solidFill>
+            <a:schemeClr val="phClr"/>
+          </a:solidFill>
+          <a:prstDash val="solid"/>
+          <a:miter lim="800000"/>
+        </a:ln>
+        <a:ln w="19050" cap="flat" cmpd="sng" algn="ctr">
+          <a:solidFill>
+            <a:schemeClr val="phClr"/>
+          </a:solidFill>
+          <a:prstDash val="solid"/>
+          <a:miter lim="800000"/>
+        </a:ln>
+        <a:ln w="25400" cap="flat" cmpd="sng" algn="ctr">
+          <a:solidFill>
+            <a:schemeClr val="phClr"/>
+          </a:solidFill>
+          <a:prstDash val="solid"/>
+          <a:miter lim="800000"/>
+        </a:ln>
+      </a:lnStyleLst>
+      <a:effectStyleLst>
+        <a:effectStyle>
+          <a:effectLst/>
+        </a:effectStyle>
+        <a:effectStyle>
+          <a:effectLst/>
+        </a:effectStyle>
+        <a:effectStyle>
+          <a:effectLst>
+            <a:outerShdw blurRad="57150" dist="19050" dir="5400000" algn="ctr" rotWithShape="0">
+              <a:srgbClr val="000000">
+                <a:alpha val="63000"/>
+              </a:srgbClr>
+            </a:outerShdw>
+          </a:effectLst>
+        </a:effectStyle>
+      </a:effectStyleLst>
+      <a:bgFillStyleLst>
+        <a:solidFill>
+          <a:schemeClr val="phClr"/>
+        </a:solidFill>
+        <a:solidFill>
+          <a:schemeClr val="phClr">
+            <a:tint val="95000"/>
+            <a:satMod val="170000"/>
+          </a:schemeClr>
+        </a:solidFill>
+        <a:gradFill rotWithShape="1">
+          <a:gsLst>
+            <a:gs pos="0">
+              <a:schemeClr val="phClr">
+                <a:tint val="93000"/>
+                <a:satMod val="150000"/>
+                <a:shade val="98000"/>
+                <a:lumMod val="102000"/>
+              </a:schemeClr>
+            </a:gs>
+            <a:gs pos="50000">
+              <a:schemeClr val="phClr">
+                <a:tint val="98000"/>
+                <a:satMod val="130000"/>
+                <a:shade val="90000"/>
+                <a:lumMod val="103000"/>
+              </a:schemeClr>
+            </a:gs>
+            <a:gs pos="100000">
+              <a:schemeClr val="phClr">
+                <a:shade val="63000"/>
+                <a:satMod val="120000"/>
+              </a:schemeClr>
+            </a:gs>
+          </a:gsLst>
+          <a:lin ang="5400000" scaled="0"/>
+        </a:gradFill>
+      </a:bgFillStyleLst>
+    </a:fmtScheme>
+  </a:themeElements>
+  <a:objectDefaults>
+    <a:lnDef>
+      <a:spPr/>
+      <a:bodyPr/>
+      <a:lstStyle/>
+      <a:style>
+        <a:lnRef idx="2">
+          <a:schemeClr val="accent1"/>
+        </a:lnRef>
+        <a:fillRef idx="0">
+          <a:schemeClr val="accent1"/>
+        </a:fillRef>
+        <a:effectRef idx="1">
+          <a:schemeClr val="accent1"/>
+        </a:effectRef>
+        <a:fontRef idx="minor">
+          <a:schemeClr val="tx1"/>
+        </a:fontRef>
+      </a:style>
+    </a:lnDef>
+  </a:objectDefaults>
+  <a:extraClrSchemeLst/>
+  <a:extLst>
+    <a:ext uri="{05A4C25C-085E-4340-85A3-A5531E510DB2}">
+      <thm15:themeFamily xmlns:thm15="http://schemas.microsoft.com/office/thememl/2012/main" name="Office Theme" id="{2E142A2C-CD16-42D6-873A-C26D2A0506FA}" vid="{1BDDFF52-6CD6-40A5-AB3C-68EB2F1E4D0A}"/>
+    </a:ext>
+  </a:extLst>
+</a:theme>
 </file>